--- a/content/W04/D4/slides/C2_W04_D04_half1_STUDENT.pptx
+++ b/content/W04/D4/slides/C2_W04_D04_half1_STUDENT.pptx
@@ -1696,7 +1696,7 @@
           <a:lstStyle/>
           <a:p>
             <a:r>
-              <a:t>LIVE, 2 minutes. Vote. The d voters are thinking well: they expect the sale cohort to show up. Ask</a:t>
+              <a:t>LIVE, 2 minutes. Vote. The d voters are thinking well: they expect the August cohort to show up. Ask</a:t>
             </a:r>
           </a:p>
           <a:p>
@@ -2211,7 +2211,7 @@
           </a:p>
           <a:p>
             <a:r>
-              <a:t>sale cohort falls as July's did); name it as one. Strike on the hypothesis board: a cohort</a:t>
+              <a:t>August cohort falls as July's did); name it as one. Strike on the hypothesis board: a cohort</a:t>
             </a:r>
           </a:p>
           <a:p>
@@ -7303,7 +7303,7 @@
                           </a:solidFill>
                           <a:latin typeface="Calibri"/>
                         </a:rPr>
-                        <a:t>The August cohort, joined in a sale week</a:t>
+                        <a:t>The August cohort, grown by a sale week</a:t>
                       </a:r>
                     </a:p>
                   </a:txBody>
@@ -14532,7 +14532,7 @@
                 </a:solidFill>
                 <a:latin typeface="Calibri"/>
               </a:rPr>
-              <a:t>The membership lead, about to report "nothing changed" because the number is flat. If the flat number hides falling cohorts and a weak sale cohort, the fix waits a month too long.</a:t>
+              <a:t>The membership lead, about to report "nothing changed" because the number is flat. If the flat number hides falling cohorts and a weak August cohort, the fix waits a month too long.</a:t>
             </a:r>
           </a:p>
         </p:txBody>
@@ -15394,7 +15394,7 @@
                 </a:solidFill>
                 <a:latin typeface="Calibri"/>
               </a:rPr>
-              <a:t>The sale cohort, and what it will do in October</a:t>
+              <a:t>The August cohort, and what it will do in October</a:t>
             </a:r>
           </a:p>
         </p:txBody>
@@ -18024,7 +18024,7 @@
                 </a:solidFill>
                 <a:latin typeface="Calibri"/>
               </a:rPr>
-              <a:t>d) Flat until September, then a drop when the sale cohort arrives</a:t>
+              <a:t>d) Flat until September, then a drop when the August cohort arrives</a:t>
             </a:r>
           </a:p>
         </p:txBody>
@@ -19876,7 +19876,7 @@
                 </a:solidFill>
                 <a:latin typeface="Calibri"/>
               </a:rPr>
-              <a:t>"Month-two retention is 38 percent and flat, so nothing changed." The decision it would mislead: the sale cohort gets no action, the dashboard stays the month's headline, and October's drop arrives as a surprise.</a:t>
+              <a:t>"Month-two retention is 38 percent and flat, so nothing changed." The decision it would mislead: the August cohort gets no action, the dashboard stays the month's headline, and October's drop arrives as a surprise.</a:t>
             </a:r>
           </a:p>
         </p:txBody>
@@ -23085,7 +23085,7 @@
                 </a:solidFill>
                 <a:latin typeface="Calibri"/>
               </a:rPr>
-              <a:t>The answer is b: 17,248 of 48,000, 35.9 percent. Split by how they joined, the 4,973 organic August members kept 49 percent in month one, July's rate; the 8,027 sale-week members kept 20. In October they enter the dashboard; if they fall from month one to month two as July's cohort did, the dashboard drops to about 33 percent (32 to 34 if they enter anywhere from 17 to 24).</a:t>
+              <a:t>The answer is b: 17,248 of 48,000, 35.9 percent. Split by how they joined, the 4,973 organic August members kept 49 percent in month one, July's rate; the 8,027 sale-week members kept 20. In October the whole August cohort enters the dashboard; if it falls from month one to month two as July's did, 31 to about 20.5 percent, the dashboard drops to about 33 percent (32 to 34 if it enters anywhere from 17 to 24).</a:t>
             </a:r>
           </a:p>
         </p:txBody>
@@ -25108,7 +25108,7 @@
                 </a:solidFill>
                 <a:latin typeface="Georgia"/>
               </a:rPr>
-              <a:t>"It is both, and they need different fixes. The dashboard reads 38 because it averages cohorts on a slow slide and has not yet counted the 13,000-member sale cohort, whose sale-week members kept 20 percent in month one; when they enter in October it drops to about 33. The order loss sits in one step, checkout start to order placed, for members on Android since the 14 September release: 72.5 to 55 percent, about 1,317 orders a week. Fix the Android checkout first, and judge the sale cohort on its own curve before buying another one."</a:t>
+              <a:t>"It is both, and they need different fixes. The dashboard reads 38 because it averages cohorts on a slow slide and has not yet counted the 13,000-member August cohort, whose sale-week members kept 20 percent in month one; when that cohort enters in October, the dashboard drops to about 33. The order loss sits in one step, checkout start to order placed, for members on Android since the 14 September release: 72.5 to 55 percent, about 1,317 orders a week. Fix the Android checkout first, and judge the next sale's members on their own curve before buying another sale."</a:t>
             </a:r>
           </a:p>
         </p:txBody>
@@ -32656,7 +32656,7 @@
                           </a:solidFill>
                           <a:latin typeface="Calibri"/>
                         </a:rPr>
-                        <a:t>Selection: the sale cohort was bought on a discount</a:t>
+                        <a:t>Selection: the sale-week members were bought on a discount</a:t>
                       </a:r>
                     </a:p>
                   </a:txBody>

--- a/content/W04/D4/slides/C2_W04_D04_half1_STUDENT.pptx
+++ b/content/W04/D4/slides/C2_W04_D04_half1_STUDENT.pptx
@@ -1081,7 +1081,12 @@
           </a:p>
           <a:p>
             <a:r>
-              <a:t>https://www.eternal.com/blog/q1fy27/ (checked 12 October 2026)</a:t>
+              <a:t>https://www.eternal.com/blog/q1fy27/ (checked 12 October 2026), which links the letter itself:</a:t>
+            </a:r>
+          </a:p>
+          <a:p>
+            <a:r>
+              <a:t>https://drive.google.com/file/d/1jb9KWd4Ap4RTKHFHxzEOO7jgQqVZEGcd/view (checked 12 October 2026)</a:t>
             </a:r>
           </a:p>
           <a:p>

--- a/content/W04/D4/slides/C2_W04_D04_half1_STUDENT.pptx
+++ b/content/W04/D4/slides/C2_W04_D04_half1_STUDENT.pptx
@@ -1441,17 +1441,22 @@
           <a:lstStyle/>
           <a:p>
             <a:r>
-              <a:t>LIVE, 5 minutes. Read the code a line at a time: age as the gap in months, active as at least one</a:t>
-            </a:r>
-          </a:p>
-          <a:p>
-            <a:r>
-              <a:t>order, one pivot_table with cohorts on the rows and ages on the columns; each cell is a mean of</a:t>
-            </a:r>
-          </a:p>
-          <a:p>
-            <a:r>
-              <a:t>True and False, so it is a share. Vote before the cell runs.</a:t>
+              <a:t>LIVE, 5 minutes. Read the code a line at a time: each year-month as one count of months, age as</a:t>
+            </a:r>
+          </a:p>
+          <a:p>
+            <a:r>
+              <a:t>the gap between the two, then one pivot_table with cohorts on the rows and ages on the columns;</a:t>
+            </a:r>
+          </a:p>
+          <a:p>
+            <a:r>
+              <a:t>active (at least one order) was set when the table loaded, and each cell is a mean of True and</a:t>
+            </a:r>
+          </a:p>
+          <a:p>
+            <a:r>
+              <a:t>False, so it is a share. Vote before the cell runs.</a:t>
             </a:r>
           </a:p>
           <a:p>
@@ -16135,7 +16140,7 @@
                 </a:solidFill>
                 <a:latin typeface="Consolas"/>
               </a:rPr>
-              <a:t>to_n = lambda s: s.str[:4].astype(int) * 12 + s.str[5:].astype(int)</a:t>
+              <a:t>month_n = mm["month"].str[:4].astype(int) * 12 + mm["month"].str[5:].astype(int)</a:t>
             </a:r>
           </a:p>
           <a:p>
@@ -16151,7 +16156,7 @@
                 </a:solidFill>
                 <a:latin typeface="Consolas"/>
               </a:rPr>
-              <a:t>mm["age"] = to_n(mm["month"]) - to_n(mm["cohort_month"])   # month zero is the joining month</a:t>
+              <a:t>cohort_n = mm["cohort_month"].str[:4].astype(int) * 12 + mm["cohort_month"].str[5:].astype(int)</a:t>
             </a:r>
           </a:p>
           <a:p>
@@ -16167,7 +16172,7 @@
                 </a:solidFill>
                 <a:latin typeface="Consolas"/>
               </a:rPr>
-              <a:t>mm["active"] = mm["orders"] &gt; 0</a:t>
+              <a:t>mm["age"] = month_n - cohort_n          # month zero is the joining month</a:t>
             </a:r>
           </a:p>
           <a:p>

--- a/content/W04/D4/slides/C2_W04_D04_half1_STUDENT.pptx
+++ b/content/W04/D4/slides/C2_W04_D04_half1_STUDENT.pptx
@@ -541,6 +541,16 @@
           <a:lstStyle/>
           <a:p>
             <a:r>
+              <a:t>Source for Gold's free delivery: Zomato's shareholder letter of 19 May 2023,</a:t>
+            </a:r>
+          </a:p>
+          <a:p>
+            <a:r>
+              <a:t>https://www.bseindia.com/xml-data/corpfiling/AttachHis/42b3bf3b-1edb-4da7-849a-87ca9da27ff8.pdf (checked 12 October 2026)</a:t>
+            </a:r>
+          </a:p>
+          <a:p>
+            <a:r>
               <a:t>LIVE, 4 minutes. Say the label line aloud first: the company is real, the situation and the data are</a:t>
             </a:r>
           </a:p>
@@ -1001,7 +1011,12 @@
           </a:p>
           <a:p>
             <a:r>
-              <a:t>the blend falls. Ask: on the Gold dashboard, what plays the part of batch B?</a:t>
+              <a:t>the blend falls. Ask: on the Gold dashboard, what plays the part of batch B? Each month's newly</a:t>
+            </a:r>
+          </a:p>
+          <a:p>
+            <a:r>
+              <a:t>counted cohort, entering at about 38.5 and only about 5,000 strong.</a:t>
             </a:r>
           </a:p>
           <a:p>
@@ -1096,7 +1111,7 @@
           </a:p>
           <a:p>
             <a:r>
-              <a:t>LIVE, 6 minutes. Two decisions to read. Eternal shows the customer number and the spend number side</a:t>
+              <a:t>LIVE, 6 minutes. Two decisions to read. Eternal shows the customer number and the value number side</a:t>
             </a:r>
           </a:p>
           <a:p>
@@ -1106,12 +1121,17 @@
           </a:p>
           <a:p>
             <a:r>
-              <a:t>possible because survivors spend more. Swiggy weaned away weak users, which lifts every later column</a:t>
-            </a:r>
-          </a:p>
-          <a:p>
-            <a:r>
-              <a:t>of its table with no change in anyone's behaviour. Ask: before trusting either chart, what do you</a:t>
+              <a:t>possible because the customers still ordering spend more; the letter's own words are that a cohort</a:t>
+            </a:r>
+          </a:p>
+          <a:p>
+            <a:r>
+              <a:t>spends nearly 3x three years after acquisition. Swiggy weaned away weak users, which lifts that quarter's cells</a:t>
+            </a:r>
+          </a:p>
+          <a:p>
+            <a:r>
+              <a:t>and every later one with no change in anyone's behaviour. Ask: before trusting either chart, what do you</a:t>
             </a:r>
           </a:p>
           <a:p>
@@ -1531,12 +1551,12 @@
           <a:lstStyle/>
           <a:p>
             <a:r>
-              <a:t>LIVE, 1 minute. Monday paid for trips, Tuesday put one denominator on one slide, Wednesday judged</a:t>
-            </a:r>
-          </a:p>
-          <a:p>
-            <a:r>
-              <a:t>a pair against chance. Thursday judges a cohort against the blend. Friday stays dashed. The</a:t>
+              <a:t>LIVE, 1 minute. Monday asked whether the number paid for measures what is wanted, Tuesday put</a:t>
+            </a:r>
+          </a:p>
+          <a:p>
+            <a:r>
+              <a:t>one denominator on one slide, Wednesday judged a pair against chance. Thursday judges a cohort against the blend. Friday stays dashed. The</a:t>
             </a:r>
           </a:p>
           <a:p>
@@ -3096,17 +3116,22 @@
           <a:lstStyle/>
           <a:p>
             <a:r>
-              <a:t>LIVE, 6 minutes. Read the three lines. Then the tracking check from the hypothesis board: the</a:t>
-            </a:r>
-          </a:p>
-          <a:p>
-            <a:r>
-              <a:t>release renamed one Android event and the app team mapped it, and the fall holds with the date</a:t>
-            </a:r>
-          </a:p>
-          <a:p>
-            <a:r>
-              <a:t>moved a week either way, so it is behaviour, not counting. The tracking cause is struck.</a:t>
+              <a:t>LIVE, 6 minutes. Read the three lines. The moved cut dates the fall; it does not test tracking,</a:t>
+            </a:r>
+          </a:p>
+          <a:p>
+            <a:r>
+              <a:t>since the rename shipped with the release and a logging fault would also start on 14 September.</a:t>
+            </a:r>
+          </a:p>
+          <a:p>
+            <a:r>
+              <a:t>The tracking test is S36's: the orders counted in member_months against the event log. Every</a:t>
+            </a:r>
+          </a:p>
+          <a:p>
+            <a:r>
+              <a:t>Android session from 14 September ran checkout v2, so the date and the version are one split here.</a:t>
             </a:r>
           </a:p>
           <a:p>
@@ -3191,7 +3216,17 @@
           </a:p>
           <a:p>
             <a:r>
-              <a:t>the release. The afternoon's role card replays this dispute.</a:t>
+              <a:t>the release. Only members on Android fell, so the place to look is something in the new flow that</a:t>
+            </a:r>
+          </a:p>
+          <a:p>
+            <a:r>
+              <a:t>members see. The 55 rests on 18,273 checkout starts, so chance moves it by under a point; the</a:t>
+            </a:r>
+          </a:p>
+          <a:p>
+            <a:r>
+              <a:t>non-members' comparator rests on 1,600, so "held" there means within about 2.5 points. The afternoon's role card replays this dispute.</a:t>
             </a:r>
           </a:p>
           <a:p>
@@ -3276,12 +3311,22 @@
           </a:p>
           <a:p>
             <a:r>
-              <a:t>LIVE, 12 minutes. One caveat at a time, each with the fact that settles it (L4). Strike the last</a:t>
-            </a:r>
-          </a:p>
-          <a:p>
-            <a:r>
-              <a:t>lines of the hypothesis board: tracking is ruled out, the definition explained, a cohort problem</a:t>
+              <a:t>LIVE, 12 minutes. One caveat at a time, each with the fact that settles it (L4). The last row</a:t>
+            </a:r>
+          </a:p>
+          <a:p>
+            <a:r>
+              <a:t>contrasts two before-and-after readings: the release split compares Android members with iOS</a:t>
+            </a:r>
+          </a:p>
+          <a:p>
+            <a:r>
+              <a:t>members and non-members over the same weeks, which Gold's 60 percent cannot. Strike the last lines</a:t>
+            </a:r>
+          </a:p>
+          <a:p>
+            <a:r>
+              <a:t>of the hypothesis board: tracking is ruled out, the definition explained, a cohort problem</a:t>
             </a:r>
           </a:p>
           <a:p>
@@ -3376,12 +3421,17 @@
           </a:p>
           <a:p>
             <a:r>
-              <a:t>checks: the count, the rule, the cohorts, everyone, then the stage. The order is Aced's (T2): rule</a:t>
-            </a:r>
-          </a:p>
-          <a:p>
-            <a:r>
-              <a:t>out data issues first, then the definition, then segments. Each chapter's reveal strikes or confirms</a:t>
+              <a:t>checks: the count, the rule, the cohorts, everyone, then the stage. Rows 3 and 4 read the same table</a:t>
+            </a:r>
+          </a:p>
+          <a:p>
+            <a:r>
+              <a:t>two ways: cohorts compared at the same age for strength, one calendar month read across them for a</a:t>
+            </a:r>
+          </a:p>
+          <a:p>
+            <a:r>
+              <a:t>shock that hit everyone. Each chapter's reveal strikes or confirms</a:t>
             </a:r>
           </a:p>
           <a:p>
@@ -3471,6 +3521,21 @@
           </a:p>
           <a:p>
             <a:r>
+              <a:t>A "good" retention number needs its definition: Amplitude, a product-analytics vendor, says 7</a:t>
+            </a:r>
+          </a:p>
+          <a:p>
+            <a:r>
+              <a:t>percent of a cohort back on day seven puts a product in the top 25 percent of the more than 2,600</a:t>
+            </a:r>
+          </a:p>
+          <a:p>
+            <a:r>
+              <a:t>companies it studied, and its blog gives no method. Say so if the room asks for a benchmark.</a:t>
+            </a:r>
+          </a:p>
+          <a:p>
+            <a:r>
               <a:t>LIVE, 5 minutes. Say the morning's sentence: the dashboard was flat because of who it counts;</a:t>
             </a:r>
           </a:p>
@@ -3811,12 +3876,12 @@
           </a:p>
           <a:p>
             <a:r>
-              <a:t>in May, ordered in June and July, then stopped. The last line folds four sale-week members who did</a:t>
-            </a:r>
-          </a:p>
-          <a:p>
-            <a:r>
-              <a:t>not order in September. Ask each table to rewrite the card by months since joining instead of by</a:t>
+              <a:t>in May, ordered in June and July, then stopped. The last line holds four sale-week members, named</a:t>
+            </a:r>
+          </a:p>
+          <a:p>
+            <a:r>
+              <a:t>one by one, none of whom ordered in September. Ask each table to rewrite the card by months since joining instead of by</a:t>
             </a:r>
           </a:p>
           <a:p>
@@ -7149,7 +7214,7 @@
           <p:nvPr/>
         </p:nvGraphicFramePr>
         <p:xfrm>
-          <a:off x="530352" y="1834896"/>
+          <a:off x="530352" y="1850136"/>
           <a:ext cx="11130990" cy="2176272"/>
         </p:xfrm>
         <a:graphic>
@@ -7267,7 +7332,7 @@
                           </a:solidFill>
                           <a:latin typeface="Calibri"/>
                         </a:rPr>
-                        <a:t>Month one by cohort, January to August</a:t>
+                        <a:t>Month one (the first full month after joining), by signup month, January to August</a:t>
                       </a:r>
                     </a:p>
                   </a:txBody>
@@ -7490,14 +7555,116 @@
       </p:graphicFrame>
       <p:sp>
         <p:nvSpPr>
-          <p:cNvPr id="10" name="Rounded Rectangle 9"/>
+          <p:cNvPr id="10" name="TextBox 9"/>
+          <p:cNvSpPr txBox="1"/>
+          <p:nvPr/>
+        </p:nvSpPr>
+        <p:spPr>
+          <a:xfrm>
+            <a:off x="530352" y="4282440"/>
+            <a:ext cx="11130991" cy="1169416"/>
+          </a:xfrm>
+          <a:prstGeom prst="rect">
+            <a:avLst/>
+          </a:prstGeom>
+          <a:noFill/>
+        </p:spPr>
+        <p:txBody>
+          <a:bodyPr wrap="square" anchor="t" lIns="0" rIns="0" tIns="0" bIns="0">
+            <a:spAutoFit/>
+          </a:bodyPr>
+          <a:lstStyle/>
+          <a:p>
+            <a:pPr>
+              <a:spcAft>
+                <a:spcPts val="500"/>
+              </a:spcAft>
+            </a:pPr>
+            <a:r>
+              <a:rPr sz="1100" b="1" i="0">
+                <a:solidFill>
+                  <a:srgbClr val="1A1440"/>
+                </a:solidFill>
+                <a:latin typeface="Calibri"/>
+              </a:rPr>
+              <a:t>Gold</a:t>
+            </a:r>
+            <a:r>
+              <a:rPr sz="1100" b="0" i="0">
+                <a:solidFill>
+                  <a:srgbClr val="1A1440"/>
+                </a:solidFill>
+                <a:latin typeface="Calibri"/>
+              </a:rPr>
+              <a:t> is the app's paid membership, with free delivery. </a:t>
+            </a:r>
+            <a:r>
+              <a:rPr sz="1100" b="1" i="0">
+                <a:solidFill>
+                  <a:srgbClr val="1A1440"/>
+                </a:solidFill>
+                <a:latin typeface="Calibri"/>
+              </a:rPr>
+              <a:t>Data.</a:t>
+            </a:r>
+            <a:r>
+              <a:rPr sz="1100" b="0" i="0">
+                <a:solidFill>
+                  <a:srgbClr val="1A1440"/>
+                </a:solidFill>
+                <a:latin typeface="Calibri"/>
+              </a:rPr>
+              <a:t> members (53,089 who joined January to September), member_months (orders per member per month, from the order records), events (one row per stage each app session, one visit to the app, reached; August and September; platform, and checkout version v1 or the new v2; Gold members and 4,000 non-members). </a:t>
+            </a:r>
+            <a:r>
+              <a:rPr sz="1100" b="1" i="0">
+                <a:solidFill>
+                  <a:srgbClr val="1A1440"/>
+                </a:solidFill>
+                <a:latin typeface="Calibri"/>
+              </a:rPr>
+              <a:t>The ask, due Friday.</a:t>
+            </a:r>
+            <a:r>
+              <a:rPr sz="1100" b="0" i="0">
+                <a:solidFill>
+                  <a:srgbClr val="1A1440"/>
+                </a:solidFill>
+                <a:latin typeface="Calibri"/>
+              </a:rPr>
+              <a:t> Cohort problem or everyone problem; which funnel stage owns the loss; what to fix first, with the evidence. </a:t>
+            </a:r>
+            <a:r>
+              <a:rPr sz="1100" b="1" i="0">
+                <a:solidFill>
+                  <a:srgbClr val="1A1440"/>
+                </a:solidFill>
+                <a:latin typeface="Calibri"/>
+              </a:rPr>
+              <a:t>Known caveats.</a:t>
+            </a:r>
+            <a:r>
+              <a:rPr sz="1100" b="0" i="0">
+                <a:solidFill>
+                  <a:srgbClr val="1A1440"/>
+                </a:solidFill>
+                <a:latin typeface="Calibri"/>
+              </a:rPr>
+              <a:t> The home carousel opens a menu without a search; sessions and members are different units; the August cohort was bought on a discount; the release renamed one Android event, which the app team has mapped.</a:t>
+            </a:r>
+          </a:p>
+        </p:txBody>
+      </p:sp>
+      <p:sp>
+        <p:nvSpPr>
+          <p:cNvPr id="11" name="Rounded Rectangle 10"/>
           <p:cNvSpPr/>
           <p:nvPr/>
         </p:nvSpPr>
         <p:spPr>
           <a:xfrm>
-            <a:off x="530352" y="4267200"/>
-            <a:ext cx="11130991" cy="1163320"/>
+            <a:off x="530352" y="5579872"/>
+            <a:ext cx="11130991" cy="452120"/>
           </a:xfrm>
           <a:prstGeom prst="roundRect">
             <a:avLst>
@@ -7538,14 +7705,14 @@
       </p:sp>
       <p:sp>
         <p:nvSpPr>
-          <p:cNvPr id="11" name="Rounded Rectangle 10"/>
+          <p:cNvPr id="12" name="Rounded Rectangle 11"/>
           <p:cNvSpPr/>
           <p:nvPr/>
         </p:nvSpPr>
         <p:spPr>
           <a:xfrm>
-            <a:off x="676656" y="4395216"/>
-            <a:ext cx="45720" cy="907287"/>
+            <a:off x="676656" y="5707887"/>
+            <a:ext cx="45720" cy="196088"/>
           </a:xfrm>
           <a:prstGeom prst="roundRect">
             <a:avLst>
@@ -7584,14 +7751,14 @@
       </p:sp>
       <p:sp>
         <p:nvSpPr>
-          <p:cNvPr id="12" name="TextBox 11"/>
-          <p:cNvSpPr txBox="1"/>
-          <p:nvPr/>
-        </p:nvSpPr>
-        <p:spPr>
-          <a:xfrm>
-            <a:off x="877824" y="4386072"/>
-            <a:ext cx="10564063" cy="980440"/>
+          <p:cNvPr id="13" name="TextBox 12"/>
+          <p:cNvSpPr txBox="1"/>
+          <p:nvPr/>
+        </p:nvSpPr>
+        <p:spPr>
+          <a:xfrm>
+            <a:off x="877824" y="5698744"/>
+            <a:ext cx="10564063" cy="269240"/>
           </a:xfrm>
           <a:prstGeom prst="rect">
             <a:avLst/>
@@ -7611,7 +7778,7 @@
                 </a:solidFill>
                 <a:latin typeface="Calibri"/>
               </a:rPr>
-              <a:t>Data. </a:t>
+              <a:t>Illustrative case. </a:t>
             </a:r>
             <a:r>
               <a:rPr sz="1000" b="0" i="0">
@@ -7620,179 +7787,6 @@
                 </a:solidFill>
                 <a:latin typeface="Calibri"/>
               </a:rPr>
-              <a:t>members (53,089 rows: signup date, cohort month, signup channel, zone), member_months (orders per member per month since joining), events (every app session in August and September, one row per stage, with platform and checkout version; Gold members and 4,000 non-members for comparison). </a:t>
-            </a:r>
-            <a:r>
-              <a:rPr sz="1000" b="1" i="0">
-                <a:solidFill>
-                  <a:srgbClr val="1A1440"/>
-                </a:solidFill>
-                <a:latin typeface="Calibri"/>
-              </a:rPr>
-              <a:t>The ask, due Friday.</a:t>
-            </a:r>
-            <a:r>
-              <a:rPr sz="1000" b="0" i="0">
-                <a:solidFill>
-                  <a:srgbClr val="1A1440"/>
-                </a:solidFill>
-                <a:latin typeface="Calibri"/>
-              </a:rPr>
-              <a:t> Cohort problem or everyone problem; which funnel stage owns the loss; what to fix first, with the evidence. </a:t>
-            </a:r>
-            <a:r>
-              <a:rPr sz="1000" b="1" i="0">
-                <a:solidFill>
-                  <a:srgbClr val="1A1440"/>
-                </a:solidFill>
-                <a:latin typeface="Calibri"/>
-              </a:rPr>
-              <a:t>Known caveats.</a:t>
-            </a:r>
-            <a:r>
-              <a:rPr sz="1000" b="0" i="0">
-                <a:solidFill>
-                  <a:srgbClr val="1A1440"/>
-                </a:solidFill>
-                <a:latin typeface="Calibri"/>
-              </a:rPr>
-              <a:t> The home carousel opens a menu without a search; sessions and members are different units; the August cohort was bought on a discount; the release renamed one Android event, which the app team has mapped.</a:t>
-            </a:r>
-          </a:p>
-        </p:txBody>
-      </p:sp>
-      <p:sp>
-        <p:nvSpPr>
-          <p:cNvPr id="13" name="Rounded Rectangle 12"/>
-          <p:cNvSpPr/>
-          <p:nvPr/>
-        </p:nvSpPr>
-        <p:spPr>
-          <a:xfrm>
-            <a:off x="530352" y="5595112"/>
-            <a:ext cx="11130991" cy="452120"/>
-          </a:xfrm>
-          <a:prstGeom prst="roundRect">
-            <a:avLst>
-              <a:gd name="adj" fmla="val 8000"/>
-            </a:avLst>
-          </a:prstGeom>
-          <a:solidFill>
-            <a:srgbClr val="F7F5FD"/>
-          </a:solidFill>
-          <a:ln w="9525">
-            <a:solidFill>
-              <a:srgbClr val="E4E1F1"/>
-            </a:solidFill>
-          </a:ln>
-          <a:effectLst/>
-        </p:spPr>
-        <p:style>
-          <a:lnRef idx="1">
-            <a:schemeClr val="accent1"/>
-          </a:lnRef>
-          <a:fillRef idx="3">
-            <a:schemeClr val="accent1"/>
-          </a:fillRef>
-          <a:effectRef idx="2">
-            <a:schemeClr val="accent1"/>
-          </a:effectRef>
-          <a:fontRef idx="minor">
-            <a:schemeClr val="lt1"/>
-          </a:fontRef>
-        </p:style>
-        <p:txBody>
-          <a:bodyPr rtlCol="0" anchor="ctr" wrap="square"/>
-          <a:lstStyle/>
-          <a:p>
-            <a:pPr algn="ctr"/>
-          </a:p>
-        </p:txBody>
-      </p:sp>
-      <p:sp>
-        <p:nvSpPr>
-          <p:cNvPr id="14" name="Rounded Rectangle 13"/>
-          <p:cNvSpPr/>
-          <p:nvPr/>
-        </p:nvSpPr>
-        <p:spPr>
-          <a:xfrm>
-            <a:off x="676656" y="5723127"/>
-            <a:ext cx="45720" cy="196088"/>
-          </a:xfrm>
-          <a:prstGeom prst="roundRect">
-            <a:avLst>
-              <a:gd name="adj" fmla="val 50000"/>
-            </a:avLst>
-          </a:prstGeom>
-          <a:solidFill>
-            <a:srgbClr val="5B3FD6"/>
-          </a:solidFill>
-          <a:ln>
-            <a:noFill/>
-          </a:ln>
-          <a:effectLst/>
-        </p:spPr>
-        <p:style>
-          <a:lnRef idx="1">
-            <a:schemeClr val="accent1"/>
-          </a:lnRef>
-          <a:fillRef idx="3">
-            <a:schemeClr val="accent1"/>
-          </a:fillRef>
-          <a:effectRef idx="2">
-            <a:schemeClr val="accent1"/>
-          </a:effectRef>
-          <a:fontRef idx="minor">
-            <a:schemeClr val="lt1"/>
-          </a:fontRef>
-        </p:style>
-        <p:txBody>
-          <a:bodyPr rtlCol="0" anchor="ctr" wrap="square"/>
-          <a:lstStyle/>
-          <a:p>
-            <a:pPr algn="ctr"/>
-          </a:p>
-        </p:txBody>
-      </p:sp>
-      <p:sp>
-        <p:nvSpPr>
-          <p:cNvPr id="15" name="TextBox 14"/>
-          <p:cNvSpPr txBox="1"/>
-          <p:nvPr/>
-        </p:nvSpPr>
-        <p:spPr>
-          <a:xfrm>
-            <a:off x="877824" y="5713984"/>
-            <a:ext cx="10564063" cy="269240"/>
-          </a:xfrm>
-          <a:prstGeom prst="rect">
-            <a:avLst/>
-          </a:prstGeom>
-          <a:noFill/>
-        </p:spPr>
-        <p:txBody>
-          <a:bodyPr wrap="square" anchor="ctr" lIns="0" rIns="0" tIns="0" bIns="0">
-            <a:spAutoFit/>
-          </a:bodyPr>
-          <a:lstStyle/>
-          <a:p>
-            <a:r>
-              <a:rPr sz="1000" b="1">
-                <a:solidFill>
-                  <a:srgbClr val="5B3FD6"/>
-                </a:solidFill>
-                <a:latin typeface="Calibri"/>
-              </a:rPr>
-              <a:t>Illustrative case. </a:t>
-            </a:r>
-            <a:r>
-              <a:rPr sz="1000" b="0" i="0">
-                <a:solidFill>
-                  <a:srgbClr val="1A1440"/>
-                </a:solidFill>
-                <a:latin typeface="Calibri"/>
-              </a:rPr>
               <a:t>The company is real; the situation and the data are synthetic, built for this class.</a:t>
             </a:r>
           </a:p>
@@ -7800,7 +7794,7 @@
       </p:sp>
       <p:sp>
         <p:nvSpPr>
-          <p:cNvPr id="16" name="Oval 15"/>
+          <p:cNvPr id="14" name="Oval 13"/>
           <p:cNvSpPr/>
           <p:nvPr/>
         </p:nvSpPr>
@@ -7844,7 +7838,7 @@
       </p:sp>
       <p:sp>
         <p:nvSpPr>
-          <p:cNvPr id="17" name="TextBox 16"/>
+          <p:cNvPr id="15" name="TextBox 14"/>
           <p:cNvSpPr txBox="1"/>
           <p:nvPr/>
         </p:nvSpPr>
@@ -7879,7 +7873,7 @@
       </p:sp>
       <p:sp>
         <p:nvSpPr>
-          <p:cNvPr id="18" name="Oval 17"/>
+          <p:cNvPr id="16" name="Oval 15"/>
           <p:cNvSpPr/>
           <p:nvPr/>
         </p:nvSpPr>
@@ -7923,7 +7917,7 @@
       </p:sp>
       <p:sp>
         <p:nvSpPr>
-          <p:cNvPr id="19" name="TextBox 18"/>
+          <p:cNvPr id="17" name="TextBox 16"/>
           <p:cNvSpPr txBox="1"/>
           <p:nvPr/>
         </p:nvSpPr>
@@ -7958,7 +7952,7 @@
       </p:sp>
       <p:sp>
         <p:nvSpPr>
-          <p:cNvPr id="20" name="Oval 19"/>
+          <p:cNvPr id="18" name="Oval 17"/>
           <p:cNvSpPr/>
           <p:nvPr/>
         </p:nvSpPr>
@@ -8002,7 +7996,7 @@
       </p:sp>
       <p:sp>
         <p:nvSpPr>
-          <p:cNvPr id="21" name="TextBox 20"/>
+          <p:cNvPr id="19" name="TextBox 18"/>
           <p:cNvSpPr txBox="1"/>
           <p:nvPr/>
         </p:nvSpPr>
@@ -8037,7 +8031,7 @@
       </p:sp>
       <p:sp>
         <p:nvSpPr>
-          <p:cNvPr id="22" name="TextBox 21"/>
+          <p:cNvPr id="20" name="TextBox 19"/>
           <p:cNvSpPr txBox="1"/>
           <p:nvPr/>
         </p:nvSpPr>
@@ -8757,7 +8751,7 @@
         <p:spPr>
           <a:xfrm>
             <a:off x="530352" y="3553968"/>
-            <a:ext cx="11130991" cy="1048512"/>
+            <a:ext cx="11130991" cy="1324864"/>
           </a:xfrm>
           <a:prstGeom prst="rect">
             <a:avLst/>
@@ -8800,7 +8794,7 @@
                 </a:solidFill>
                 <a:latin typeface="Calibri"/>
               </a:rPr>
-              <a:t> is a group that joined in the same month; fixing the entry moment is what makes the three comparable at all.</a:t>
+              <a:t> is a group that joined in the same month; fixing the entry moment is what makes the three comparable at all. The twelve were picked to show the pattern on one card: on all 53,089, May's month one is 52 percent and June's 50.</a:t>
             </a:r>
           </a:p>
         </p:txBody>
@@ -10742,7 +10736,7 @@
         <p:spPr>
           <a:xfrm>
             <a:off x="530352" y="1243584"/>
-            <a:ext cx="11130991" cy="234696"/>
+            <a:ext cx="11130991" cy="399796"/>
           </a:xfrm>
           <a:prstGeom prst="rect">
             <a:avLst/>
@@ -10757,13 +10751,13 @@
           <a:p>
             <a:pPr algn="l"/>
             <a:r>
-              <a:rPr sz="1200" b="0" i="0">
+              <a:rPr sz="1100" b="0" i="0">
                 <a:solidFill>
                   <a:srgbClr val="6B6690"/>
                 </a:solidFill>
                 <a:latin typeface="Calibri"/>
               </a:rPr>
-              <a:t>Batch A of 100 stood at 50 percent; now A is at 40 and a new batch B of 400 arrives at 52.5 percent. What does the blend do (invented)?</a:t>
+              <a:t>Batch A of 100 stood at 50 percent; now A is at 40 and a new batch B of 400 arrives at 52.5 percent. What does the blend, the one rate over both batches, do (invented)?</a:t>
             </a:r>
           </a:p>
         </p:txBody>
@@ -11363,7 +11357,7 @@
                 </a:solidFill>
                 <a:latin typeface="Calibri"/>
               </a:rPr>
-              <a:t>How can a blend stand still while every batch shrinks?</a:t>
+              <a:t>How can a blend stand still while the old batch shrinks?</a:t>
             </a:r>
           </a:p>
         </p:txBody>
@@ -11384,8 +11378,8 @@
         </p:blipFill>
         <p:spPr>
           <a:xfrm>
-            <a:off x="2627327" y="1664208"/>
-            <a:ext cx="6937040" cy="3215639"/>
+            <a:off x="3223496" y="1664208"/>
+            <a:ext cx="5744702" cy="2662936"/>
           </a:xfrm>
           <a:prstGeom prst="rect">
             <a:avLst/>
@@ -11400,7 +11394,7 @@
         </p:nvSpPr>
         <p:spPr>
           <a:xfrm>
-            <a:off x="530352" y="4916423"/>
+            <a:off x="530352" y="4363720"/>
             <a:ext cx="11130991" cy="316992"/>
           </a:xfrm>
           <a:prstGeom prst="rect">
@@ -11435,8 +11429,8 @@
         </p:nvSpPr>
         <p:spPr>
           <a:xfrm>
-            <a:off x="530352" y="5242560"/>
-            <a:ext cx="11130991" cy="957072"/>
+            <a:off x="530352" y="4689856"/>
+            <a:ext cx="11130991" cy="1509775"/>
           </a:xfrm>
           <a:prstGeom prst="rect">
             <a:avLst/>
@@ -11456,7 +11450,7 @@
                 </a:solidFill>
                 <a:latin typeface="Calibri"/>
               </a:rPr>
-              <a:t>The answer is c: (100 × 0.40 + 400 × 0.525) / 500 = 250 / 500 = 50 percent. A blend is an average weighted by size: blend = sum of (cohort size × cohort rate) / sum of cohort sizes. A large young batch at a high early rate props it up while every batch falls with age.</a:t>
+              <a:t>The answer is c: (100 × 0.40 + 400 × 0.525) / 500 = 250 / 500 = 50 percent. A blend is an average weighted by size: blend = sum of (cohort size × cohort rate) / sum of cohort sizes. A large young batch at a high early rate props it up while the old batch falls. On the Gold dashboard the prop is gentler, as chapter 2 shows: each month one new cohort of about 5,000 enters the count at about 38.5 percent, a little above the older cohorts' slow slide.</a:t>
             </a:r>
           </a:p>
         </p:txBody>
@@ -11983,7 +11977,7 @@
         <p:spPr>
           <a:xfrm>
             <a:off x="530352" y="1956816"/>
-            <a:ext cx="5474055" cy="2344420"/>
+            <a:ext cx="5474055" cy="2534412"/>
           </a:xfrm>
           <a:prstGeom prst="roundRect">
             <a:avLst>
@@ -12126,7 +12120,7 @@
                 </a:solidFill>
                 <a:latin typeface="Calibri"/>
               </a:rPr>
-              <a:t>ETERNAL, BLINKIT</a:t>
+              <a:t>ETERNAL, THE COMPANY BEHIND ZOMATO AND BLINKIT</a:t>
             </a:r>
           </a:p>
         </p:txBody>
@@ -12161,7 +12155,7 @@
                 </a:solidFill>
                 <a:latin typeface="Calibri"/>
               </a:rPr>
-              <a:t>46 percent of customers, 150 percent of spend</a:t>
+              <a:t>46 percent of customers, 150 percent of value</a:t>
             </a:r>
           </a:p>
         </p:txBody>
@@ -12175,7 +12169,7 @@
         <p:spPr>
           <a:xfrm>
             <a:off x="731519" y="3303524"/>
-            <a:ext cx="5071719" cy="763016"/>
+            <a:ext cx="5071719" cy="944626"/>
           </a:xfrm>
           <a:prstGeom prst="rect">
             <a:avLst/>
@@ -12196,7 +12190,7 @@
                 </a:solidFill>
                 <a:latin typeface="Calibri"/>
               </a:rPr>
-              <a:t>Q4 retention averaged 46 percent across cohorts and every successive cohort improved; NOV retention, the net value of a cohort's orders against its first quarter, was 150 percent at Q4 and 279 percent at Q12, because the customers who stay spend more</a:t>
+              <a:t>Blinkit is its quick-commerce app. In the fourth quarter after joining, 46 percent of a cohort's customers still ordered, on average. The cohort's net order value (NOV) in that quarter was 150 percent of its first quarter's, and 279 percent by the twelfth: fewer customers, more value, so those who stay order much more</a:t>
             </a:r>
           </a:p>
         </p:txBody>
@@ -12210,7 +12204,7 @@
         <p:spPr>
           <a:xfrm>
             <a:off x="6187287" y="1956816"/>
-            <a:ext cx="5474055" cy="2344420"/>
+            <a:ext cx="5474055" cy="2534412"/>
           </a:xfrm>
           <a:prstGeom prst="roundRect">
             <a:avLst>
@@ -12353,7 +12347,7 @@
                 </a:solidFill>
                 <a:latin typeface="Calibri"/>
               </a:rPr>
-              <a:t>SWIGGY INSTAMART</a:t>
+              <a:t>SWIGGY INSTAMART, SWIGGY'S QUICK-COMMERCE APP</a:t>
             </a:r>
           </a:p>
         </p:txBody>
@@ -12388,7 +12382,7 @@
                 </a:solidFill>
                 <a:latin typeface="Calibri"/>
               </a:rPr>
-              <a:t>A cohort table, indexed to one cohort</a:t>
+              <a:t>Spend by cohort, against the quarter it joined</a:t>
             </a:r>
           </a:p>
         </p:txBody>
@@ -12402,7 +12396,7 @@
         <p:spPr>
           <a:xfrm>
             <a:off x="6388455" y="3303524"/>
-            <a:ext cx="5071719" cy="581406"/>
+            <a:ext cx="5071719" cy="944626"/>
           </a:xfrm>
           <a:prstGeom prst="rect">
             <a:avLst/>
@@ -12423,7 +12417,7 @@
                 </a:solidFill>
                 <a:latin typeface="Calibri"/>
               </a:rPr>
-              <a:t>Spend by cohort indexed to the Q4 FY24 cohort's first quarter; Swiggy says it weaned away users with low expected lifetime value, so ask whether a column is per acquired user or per user who stayed</a:t>
+              <a:t>The cohort that joined in Q4 FY24 (January to March 2024) spends 4.14 times in its sixth quarter what it spent in its first. Swiggy says it weaned away users with "low potential Lifetime values", withdrawing the offers that kept them, and the table states no denominator: per user who joined, or per user who stayed?</a:t>
             </a:r>
           </a:p>
         </p:txBody>
@@ -12436,7 +12430,7 @@
         </p:nvSpPr>
         <p:spPr>
           <a:xfrm>
-            <a:off x="530352" y="4484116"/>
+            <a:off x="530352" y="4674108"/>
             <a:ext cx="11130991" cy="772160"/>
           </a:xfrm>
           <a:prstGeom prst="rect">
@@ -12462,7 +12456,7 @@
                 </a:solidFill>
                 <a:latin typeface="Calibri"/>
               </a:rPr>
-              <a:t>Sources: Eternal's Q1 FY27 shareholder letter of 22 July 2026 and Swiggy's Q2 FY26 shareholder letter, each checked 12 October 2026.</a:t>
+              <a:t>Sources: Eternal's Q1 FY27 shareholder letter of 22 July 2026 and Swiggy's Q2 FY26 shareholder letter, each checked 12 October 2026. India's financial year runs April to March.</a:t>
             </a:r>
           </a:p>
         </p:txBody>
@@ -12996,7 +12990,7 @@
         </p:blipFill>
         <p:spPr>
           <a:xfrm>
-            <a:off x="530352" y="1912424"/>
+            <a:off x="530352" y="1682496"/>
             <a:ext cx="11130991" cy="1243975"/>
           </a:xfrm>
           <a:prstGeom prst="rect">
@@ -13012,7 +13006,7 @@
         </p:nvSpPr>
         <p:spPr>
           <a:xfrm>
-            <a:off x="530352" y="3302703"/>
+            <a:off x="530352" y="3072775"/>
             <a:ext cx="11130991" cy="1380744"/>
           </a:xfrm>
           <a:prstGeom prst="roundRect">
@@ -13066,7 +13060,7 @@
         </p:nvSpPr>
         <p:spPr>
           <a:xfrm>
-            <a:off x="758952" y="3764475"/>
+            <a:off x="758952" y="3534547"/>
             <a:ext cx="457200" cy="457200"/>
           </a:xfrm>
           <a:prstGeom prst="ellipse">
@@ -13118,7 +13112,7 @@
         </p:blipFill>
         <p:spPr>
           <a:xfrm>
-            <a:off x="868680" y="3874203"/>
+            <a:off x="868680" y="3644275"/>
             <a:ext cx="237744" cy="237744"/>
           </a:xfrm>
           <a:prstGeom prst="rect">
@@ -13134,7 +13128,7 @@
         </p:nvSpPr>
         <p:spPr>
           <a:xfrm>
-            <a:off x="1399031" y="3449007"/>
+            <a:off x="1399031" y="3219079"/>
             <a:ext cx="9987991" cy="160401"/>
           </a:xfrm>
           <a:prstGeom prst="rect">
@@ -13169,7 +13163,7 @@
         </p:nvSpPr>
         <p:spPr>
           <a:xfrm>
-            <a:off x="1399031" y="3668463"/>
+            <a:off x="1399031" y="3438535"/>
             <a:ext cx="9987991" cy="941832"/>
           </a:xfrm>
           <a:prstGeom prst="rect">
@@ -13203,8 +13197,8 @@
         </p:nvSpPr>
         <p:spPr>
           <a:xfrm>
-            <a:off x="530352" y="4848039"/>
-            <a:ext cx="11130991" cy="1121664"/>
+            <a:off x="530352" y="4618111"/>
+            <a:ext cx="11130991" cy="1380744"/>
           </a:xfrm>
           <a:prstGeom prst="roundRect">
             <a:avLst>
@@ -13257,7 +13251,7 @@
         </p:nvSpPr>
         <p:spPr>
           <a:xfrm>
-            <a:off x="758952" y="5180271"/>
+            <a:off x="758952" y="5079883"/>
             <a:ext cx="457200" cy="457200"/>
           </a:xfrm>
           <a:prstGeom prst="ellipse">
@@ -13309,7 +13303,7 @@
         </p:blipFill>
         <p:spPr>
           <a:xfrm>
-            <a:off x="868680" y="5289999"/>
+            <a:off x="868680" y="5189611"/>
             <a:ext cx="237744" cy="237744"/>
           </a:xfrm>
           <a:prstGeom prst="rect">
@@ -13325,7 +13319,7 @@
         </p:nvSpPr>
         <p:spPr>
           <a:xfrm>
-            <a:off x="1399031" y="4994343"/>
+            <a:off x="1399031" y="4764415"/>
             <a:ext cx="9987991" cy="160401"/>
           </a:xfrm>
           <a:prstGeom prst="rect">
@@ -13360,8 +13354,8 @@
         </p:nvSpPr>
         <p:spPr>
           <a:xfrm>
-            <a:off x="1399031" y="5213799"/>
-            <a:ext cx="9987991" cy="682752"/>
+            <a:off x="1399031" y="4983871"/>
+            <a:ext cx="9987991" cy="941832"/>
           </a:xfrm>
           <a:prstGeom prst="rect">
             <a:avLst/>
@@ -13381,7 +13375,7 @@
                 </a:solidFill>
                 <a:latin typeface="Calibri"/>
               </a:rPr>
-              <a:t>[F] Blended retention is flat while every cohort declines; how? The mix changes under the average, and the average counts who it counts.</a:t>
+              <a:t>[F], a question frequent in GCC (global capability centre) and product-company screens: blended retention is flat while every cohort declines; how? The mix, each cohort's share of the count, changes under the average, and the average counts who it counts.</a:t>
             </a:r>
           </a:p>
         </p:txBody>
@@ -15930,8 +15924,8 @@
         </p:nvSpPr>
         <p:spPr>
           <a:xfrm>
-            <a:off x="530352" y="1956816"/>
-            <a:ext cx="11130991" cy="1719580"/>
+            <a:off x="530352" y="1919478"/>
+            <a:ext cx="11130991" cy="2224531"/>
           </a:xfrm>
           <a:prstGeom prst="roundRect">
             <a:avLst>
@@ -15982,7 +15976,7 @@
         </p:nvSpPr>
         <p:spPr>
           <a:xfrm>
-            <a:off x="713232" y="2084832"/>
+            <a:off x="713232" y="2047494"/>
             <a:ext cx="91440" cy="91440"/>
           </a:xfrm>
           <a:prstGeom prst="ellipse">
@@ -16026,7 +16020,7 @@
         </p:nvSpPr>
         <p:spPr>
           <a:xfrm>
-            <a:off x="868680" y="2084832"/>
+            <a:off x="868680" y="2047494"/>
             <a:ext cx="91440" cy="91440"/>
           </a:xfrm>
           <a:prstGeom prst="ellipse">
@@ -16070,7 +16064,7 @@
         </p:nvSpPr>
         <p:spPr>
           <a:xfrm>
-            <a:off x="1024128" y="2084832"/>
+            <a:off x="1024128" y="2047494"/>
             <a:ext cx="91440" cy="91440"/>
           </a:xfrm>
           <a:prstGeom prst="ellipse">
@@ -16114,8 +16108,8 @@
         </p:nvSpPr>
         <p:spPr>
           <a:xfrm>
-            <a:off x="804671" y="2286000"/>
-            <a:ext cx="10673791" cy="1317244"/>
+            <a:off x="804671" y="2248662"/>
+            <a:ext cx="10673791" cy="1822195"/>
           </a:xfrm>
           <a:prstGeom prst="rect">
             <a:avLst/>
@@ -16136,11 +16130,11 @@
             <a:r>
               <a:rPr sz="1400" b="0" i="0">
                 <a:solidFill>
-                  <a:srgbClr val="E4E1F1"/>
+                  <a:srgbClr val="A9A3D2"/>
                 </a:solidFill>
                 <a:latin typeface="Consolas"/>
               </a:rPr>
-              <a:t>month_n = mm["month"].str[:4].astype(int) * 12 + mm["month"].str[5:].astype(int)</a:t>
+              <a:t># mm is member_months; year x 12 + month is a running count, so 2026-09 minus 2026-07 is 2</a:t>
             </a:r>
           </a:p>
           <a:p>
@@ -16156,7 +16150,7 @@
                 </a:solidFill>
                 <a:latin typeface="Consolas"/>
               </a:rPr>
-              <a:t>cohort_n = mm["cohort_month"].str[:4].astype(int) * 12 + mm["cohort_month"].str[5:].astype(int)</a:t>
+              <a:t>month_n = mm["month"].str[:4].astype(int) * 12 + mm["month"].str[5:].astype(int)</a:t>
             </a:r>
           </a:p>
           <a:p>
@@ -16172,7 +16166,7 @@
                 </a:solidFill>
                 <a:latin typeface="Consolas"/>
               </a:rPr>
-              <a:t>mm["age"] = month_n - cohort_n          # month zero is the joining month</a:t>
+              <a:t>cohort_n = mm["cohort_month"].str[:4].astype(int) * 12 + mm["cohort_month"].str[5:].astype(int)</a:t>
             </a:r>
           </a:p>
           <a:p>
@@ -16188,7 +16182,7 @@
                 </a:solidFill>
                 <a:latin typeface="Consolas"/>
               </a:rPr>
-              <a:t>tri = mm[mm["age"] &gt;= 1].pivot_table(index="cohort_month", columns="age",</a:t>
+              <a:t>mm["age"] = month_n - cohort_n          # month zero is the joining month</a:t>
             </a:r>
           </a:p>
           <a:p>
@@ -16204,7 +16198,23 @@
                 </a:solidFill>
                 <a:latin typeface="Consolas"/>
               </a:rPr>
-              <a:t>                                     values="active", aggfunc="mean")</a:t>
+              <a:t>tri = mm[mm["age"] &gt;= 1].pivot_table(index="cohort_month", columns="age",</a:t>
+            </a:r>
+          </a:p>
+          <a:p>
+            <a:pPr>
+              <a:spcAft>
+                <a:spcPts val="200"/>
+              </a:spcAft>
+            </a:pPr>
+            <a:r>
+              <a:rPr sz="1400" b="0" i="0">
+                <a:solidFill>
+                  <a:srgbClr val="E4E1F1"/>
+                </a:solidFill>
+                <a:latin typeface="Consolas"/>
+              </a:rPr>
+              <a:t>                                     values="active", aggfunc="mean")   # True counts 1, so a mean is a share</a:t>
             </a:r>
           </a:p>
         </p:txBody>
@@ -16217,7 +16227,7 @@
         </p:nvSpPr>
         <p:spPr>
           <a:xfrm>
-            <a:off x="530352" y="3840988"/>
+            <a:off x="530352" y="4308601"/>
             <a:ext cx="11130991" cy="1654048"/>
           </a:xfrm>
           <a:prstGeom prst="rect">
@@ -16811,7 +16821,7 @@
       </p:sp>
       <p:pic>
         <p:nvPicPr>
-          <p:cNvPr id="9" name="mermaid diagram" descr="aa40ab7e0a74e288.png"/>
+          <p:cNvPr id="9" name="mermaid diagram" descr="6666cc6ddfa3b618.png"/>
           <p:cNvPicPr>
             <a:picLocks noChangeAspect="1"/>
           </p:cNvPicPr>
@@ -16825,8 +16835,8 @@
         </p:blipFill>
         <p:spPr>
           <a:xfrm>
-            <a:off x="1189523" y="1682496"/>
-            <a:ext cx="9812648" cy="4517136"/>
+            <a:off x="779525" y="1682496"/>
+            <a:ext cx="10632643" cy="4517136"/>
           </a:xfrm>
           <a:prstGeom prst="rect">
             <a:avLst/>
@@ -17362,8 +17372,8 @@
         </p:blipFill>
         <p:spPr>
           <a:xfrm>
-            <a:off x="2398769" y="1664208"/>
-            <a:ext cx="7394155" cy="3215640"/>
+            <a:off x="2932376" y="1664208"/>
+            <a:ext cx="6326941" cy="2939288"/>
           </a:xfrm>
           <a:prstGeom prst="rect">
             <a:avLst/>
@@ -17378,7 +17388,7 @@
         </p:nvSpPr>
         <p:spPr>
           <a:xfrm>
-            <a:off x="530352" y="4916424"/>
+            <a:off x="530352" y="4640072"/>
             <a:ext cx="11130991" cy="316992"/>
           </a:xfrm>
           <a:prstGeom prst="rect">
@@ -17413,8 +17423,8 @@
         </p:nvSpPr>
         <p:spPr>
           <a:xfrm>
-            <a:off x="530352" y="5242560"/>
-            <a:ext cx="11130991" cy="957072"/>
+            <a:off x="530352" y="4966208"/>
+            <a:ext cx="11130991" cy="1233424"/>
           </a:xfrm>
           <a:prstGeom prst="rect">
             <a:avLst/>
@@ -17434,7 +17444,7 @@
                 </a:solidFill>
                 <a:latin typeface="Calibri"/>
               </a:rPr>
-              <a:t>The answer is c. Each cohort drops from its month one to about 38.5 percent in month two and slides about 0.3 points a month after. Month one falls from 58 percent for January to 49 for July, and the 13,000-member August cohort sits at 31.</a:t>
+              <a:t>The answer is c. Each cohort drops from its month one to about 38.5 percent in month two, then slides about 0.3 points a month, close to flat; the gap between two percentages is counted in points. What changes from cohort to cohort is month one: 58 percent for January down to 49 for July, and 31 for the 13,000-member August cohort. The dashboard starts at month two, so it never sees the weaker start.</a:t>
             </a:r>
           </a:p>
         </p:txBody>
@@ -19708,7 +19718,7 @@
         </p:nvSpPr>
         <p:spPr>
           <a:xfrm>
-            <a:off x="530352" y="1878330"/>
+            <a:off x="530352" y="1682496"/>
             <a:ext cx="11130991" cy="1380744"/>
           </a:xfrm>
           <a:prstGeom prst="roundRect">
@@ -19762,7 +19772,7 @@
         </p:nvSpPr>
         <p:spPr>
           <a:xfrm>
-            <a:off x="758952" y="2340102"/>
+            <a:off x="758952" y="2144268"/>
             <a:ext cx="457200" cy="457200"/>
           </a:xfrm>
           <a:prstGeom prst="ellipse">
@@ -19814,7 +19824,7 @@
         </p:blipFill>
         <p:spPr>
           <a:xfrm>
-            <a:off x="868680" y="2449830"/>
+            <a:off x="868680" y="2253996"/>
             <a:ext cx="237744" cy="237744"/>
           </a:xfrm>
           <a:prstGeom prst="rect">
@@ -19830,7 +19840,7 @@
         </p:nvSpPr>
         <p:spPr>
           <a:xfrm>
-            <a:off x="1399031" y="2024634"/>
+            <a:off x="1399031" y="1828800"/>
             <a:ext cx="9987991" cy="160401"/>
           </a:xfrm>
           <a:prstGeom prst="rect">
@@ -19865,7 +19875,7 @@
         </p:nvSpPr>
         <p:spPr>
           <a:xfrm>
-            <a:off x="1399031" y="2244090"/>
+            <a:off x="1399031" y="2048256"/>
             <a:ext cx="9987991" cy="941832"/>
           </a:xfrm>
           <a:prstGeom prst="rect">
@@ -19899,7 +19909,7 @@
         </p:nvSpPr>
         <p:spPr>
           <a:xfrm>
-            <a:off x="530352" y="3423666"/>
+            <a:off x="530352" y="3227832"/>
             <a:ext cx="11130991" cy="1074420"/>
           </a:xfrm>
           <a:prstGeom prst="roundRect">
@@ -19947,7 +19957,7 @@
         </p:nvSpPr>
         <p:spPr>
           <a:xfrm>
-            <a:off x="676656" y="3551682"/>
+            <a:off x="676656" y="3355848"/>
             <a:ext cx="45720" cy="818388"/>
           </a:xfrm>
           <a:prstGeom prst="roundRect">
@@ -19993,7 +20003,7 @@
         </p:nvSpPr>
         <p:spPr>
           <a:xfrm>
-            <a:off x="877824" y="3542538"/>
+            <a:off x="877824" y="3346704"/>
             <a:ext cx="10564063" cy="891540"/>
           </a:xfrm>
           <a:prstGeom prst="rect">
@@ -20036,8 +20046,8 @@
         </p:nvSpPr>
         <p:spPr>
           <a:xfrm>
-            <a:off x="530352" y="4662678"/>
-            <a:ext cx="11130991" cy="1341120"/>
+            <a:off x="530352" y="4466844"/>
+            <a:ext cx="11130991" cy="1607820"/>
           </a:xfrm>
           <a:prstGeom prst="roundRect">
             <a:avLst>
@@ -20084,8 +20094,8 @@
         </p:nvSpPr>
         <p:spPr>
           <a:xfrm>
-            <a:off x="676656" y="4790693"/>
-            <a:ext cx="45720" cy="1085088"/>
+            <a:off x="676656" y="4594859"/>
+            <a:ext cx="45720" cy="1351788"/>
           </a:xfrm>
           <a:prstGeom prst="roundRect">
             <a:avLst>
@@ -20130,8 +20140,8 @@
         </p:nvSpPr>
         <p:spPr>
           <a:xfrm>
-            <a:off x="877824" y="4781550"/>
-            <a:ext cx="10564063" cy="1158240"/>
+            <a:off x="877824" y="4585716"/>
+            <a:ext cx="10564063" cy="1424940"/>
           </a:xfrm>
           <a:prstGeom prst="rect">
             <a:avLst/>
@@ -20160,7 +20170,7 @@
                 </a:solidFill>
                 <a:latin typeface="Calibri"/>
               </a:rPr>
-              <a:t>Take the number apart, cohort by cohort, and compare each piece with the direct count. Swiggy's own tables show why: monthly transacting users rose 27.4 percent while orders per user fell 6.3 percent, from 4.13 to 3.87, and the blend cannot say whether existing users ordered less or new users ordered little (Swiggy's Q1 FY27 letter of 30 July 2026, checked 12 October 2026; the 6.3 is our arithmetic).</a:t>
+              <a:t>Take the number apart, cohort by cohort, and compare each piece with the direct count. Swiggy's own tables show why: across the platform, users who ordered at least once a month rose 27.4 percent year on year while platform frequency, how often each orders, fell 6.3 percent, from 4.13 to 3.87, and the blend cannot say whether existing users ordered less or new users ordered little (Swiggy's Q1 FY27 letter of 30 July 2026, checked 12 October 2026; the 6.3 is our arithmetic).</a:t>
             </a:r>
           </a:p>
         </p:txBody>
@@ -21889,7 +21899,7 @@
                 </a:solidFill>
                 <a:latin typeface="Calibri"/>
               </a:rPr>
-              <a:t>Sum of (members × rate) over the seven cohorts = 13,218 orderers; 13,218 / 35,000 = 37.8 percent, the same to the last digit as the direct count. The newest cohorts sit highest and the oldest lowest: the youngest prop the average.</a:t>
+              <a:t>Sum of (members × rate) over the seven cohorts = 13,218 orderers; 13,218 / 35,000 = 37.8 percent, the same to the last digit as the direct count. The rates rise with youth, from January's 36.9 to June's 38.6 and July's 38.5: the younger cohorts prop the average.</a:t>
             </a:r>
           </a:p>
         </p:txBody>
@@ -23023,8 +23033,8 @@
         </p:blipFill>
         <p:spPr>
           <a:xfrm>
-            <a:off x="2127487" y="1664208"/>
-            <a:ext cx="7936720" cy="2939288"/>
+            <a:off x="3246803" y="1664208"/>
+            <a:ext cx="5698088" cy="2110232"/>
           </a:xfrm>
           <a:prstGeom prst="rect">
             <a:avLst/>
@@ -23039,7 +23049,7 @@
         </p:nvSpPr>
         <p:spPr>
           <a:xfrm>
-            <a:off x="530352" y="4640072"/>
+            <a:off x="530352" y="3811016"/>
             <a:ext cx="11130991" cy="316992"/>
           </a:xfrm>
           <a:prstGeom prst="rect">
@@ -23074,8 +23084,8 @@
         </p:nvSpPr>
         <p:spPr>
           <a:xfrm>
-            <a:off x="530352" y="4966208"/>
-            <a:ext cx="11130991" cy="1233424"/>
+            <a:off x="530352" y="4137152"/>
+            <a:ext cx="11130991" cy="2062480"/>
           </a:xfrm>
           <a:prstGeom prst="rect">
             <a:avLst/>
@@ -23095,7 +23105,7 @@
                 </a:solidFill>
                 <a:latin typeface="Calibri"/>
               </a:rPr>
-              <a:t>The answer is b: 17,248 of 48,000, 35.9 percent. Split by how they joined, the 4,973 organic August members kept 49 percent in month one, July's rate; the 8,027 sale-week members kept 20. In October the whole August cohort enters the dashboard; if it falls from month one to month two as July's did, 31 to about 20.5 percent, the dashboard drops to about 33 percent (32 to 34 if it enters anywhere from 17 to 24).</a:t>
+              <a:t>The answer is b: 17,248 of 48,000, 35.9 percent; the 5,089 who joined in September are in their month zero and in neither count. Counted this way, everyone who joined before the month, the four months read 40.9, 40.0, 39.5 and 35.9: the drop the dashboard hides. Split by how they joined, the 4,973 organic August members kept 49 percent in month one, July's rate; the 8,027 sale-week members kept 20. In October the August cohort enters the dashboard; if it loses the 10.5 points July's lost from month one to month two (49 to 38.5), 31 becomes about 20.5, and the dashboard drops to about 33 percent (32 to 34 for anything from 17 to 24).</a:t>
             </a:r>
           </a:p>
         </p:txBody>
@@ -25052,7 +25062,7 @@
         <p:spPr>
           <a:xfrm>
             <a:off x="530352" y="1956816"/>
-            <a:ext cx="45720" cy="1889759"/>
+            <a:ext cx="45720" cy="1925320"/>
           </a:xfrm>
           <a:prstGeom prst="roundRect">
             <a:avLst>
@@ -25098,41 +25108,178 @@
         <p:spPr>
           <a:xfrm>
             <a:off x="786384" y="1956816"/>
-            <a:ext cx="10820095" cy="1889759"/>
-          </a:xfrm>
-          <a:prstGeom prst="rect">
-            <a:avLst/>
-          </a:prstGeom>
-          <a:noFill/>
-        </p:spPr>
-        <p:txBody>
-          <a:bodyPr wrap="square" anchor="t" lIns="0" rIns="0" tIns="0" bIns="0">
-            <a:spAutoFit/>
-          </a:bodyPr>
-          <a:lstStyle/>
-          <a:p>
-            <a:r>
-              <a:rPr sz="1600" b="0" i="1">
+            <a:ext cx="10820095" cy="1925320"/>
+          </a:xfrm>
+          <a:prstGeom prst="rect">
+            <a:avLst/>
+          </a:prstGeom>
+          <a:noFill/>
+        </p:spPr>
+        <p:txBody>
+          <a:bodyPr wrap="square" anchor="t" lIns="0" rIns="0" tIns="0" bIns="0">
+            <a:spAutoFit/>
+          </a:bodyPr>
+          <a:lstStyle/>
+          <a:p>
+            <a:r>
+              <a:rPr sz="1400" b="0" i="1">
                 <a:solidFill>
                   <a:srgbClr val="1A0F5C"/>
                 </a:solidFill>
                 <a:latin typeface="Georgia"/>
               </a:rPr>
-              <a:t>"It is both, and they need different fixes. The dashboard reads 38 because it averages cohorts on a slow slide and has not yet counted the 13,000-member August cohort, whose sale-week members kept 20 percent in month one; when that cohort enters in October, the dashboard drops to about 33. The order loss sits in one step, checkout start to order placed, for members on Android since the 14 September release: 72.5 to 55 percent, about 1,317 orders a week. Fix the Android checkout first, and judge the next sale's members on their own curve before buying another sale."</a:t>
-            </a:r>
-          </a:p>
-        </p:txBody>
-      </p:sp>
-      <p:sp>
-        <p:nvSpPr>
-          <p:cNvPr id="11" name="TextBox 10"/>
-          <p:cNvSpPr txBox="1"/>
-          <p:nvPr/>
-        </p:nvSpPr>
-        <p:spPr>
-          <a:xfrm>
-            <a:off x="530352" y="3992880"/>
-            <a:ext cx="11130991" cy="772160"/>
+              <a:t>"It is both, in two numbers that need different fixes. Retention is a cohort problem: the dashboard starts counting at month two, where every cohort lands near 38.5, so it never sees that each new cohort starts lower in month one, and it has not yet counted the 13,000-member August cohort, whose sale-week members kept 20 percent; in October the dashboard drops to about 33. The order loss hits members of every signup month on Android at one step from the 14 September release: of the checkouts started, 72.5 percent ended in an order before and 55 after, about 1,223 to 1,317 orders a week. Fix the Android checkout first; before buying another sale, work out whether this one's members pay back their discount."</a:t>
+            </a:r>
+          </a:p>
+        </p:txBody>
+      </p:sp>
+      <p:sp>
+        <p:nvSpPr>
+          <p:cNvPr id="11" name="Rounded Rectangle 10"/>
+          <p:cNvSpPr/>
+          <p:nvPr/>
+        </p:nvSpPr>
+        <p:spPr>
+          <a:xfrm>
+            <a:off x="530352" y="4028440"/>
+            <a:ext cx="11130991" cy="967740"/>
+          </a:xfrm>
+          <a:prstGeom prst="roundRect">
+            <a:avLst>
+              <a:gd name="adj" fmla="val 8000"/>
+            </a:avLst>
+          </a:prstGeom>
+          <a:solidFill>
+            <a:srgbClr val="F7F5FD"/>
+          </a:solidFill>
+          <a:ln w="9525">
+            <a:solidFill>
+              <a:srgbClr val="E4E1F1"/>
+            </a:solidFill>
+          </a:ln>
+          <a:effectLst/>
+        </p:spPr>
+        <p:style>
+          <a:lnRef idx="1">
+            <a:schemeClr val="accent1"/>
+          </a:lnRef>
+          <a:fillRef idx="3">
+            <a:schemeClr val="accent1"/>
+          </a:fillRef>
+          <a:effectRef idx="2">
+            <a:schemeClr val="accent1"/>
+          </a:effectRef>
+          <a:fontRef idx="minor">
+            <a:schemeClr val="lt1"/>
+          </a:fontRef>
+        </p:style>
+        <p:txBody>
+          <a:bodyPr rtlCol="0" anchor="ctr" wrap="square"/>
+          <a:lstStyle/>
+          <a:p>
+            <a:pPr algn="ctr"/>
+          </a:p>
+        </p:txBody>
+      </p:sp>
+      <p:sp>
+        <p:nvSpPr>
+          <p:cNvPr id="12" name="Rounded Rectangle 11"/>
+          <p:cNvSpPr/>
+          <p:nvPr/>
+        </p:nvSpPr>
+        <p:spPr>
+          <a:xfrm>
+            <a:off x="676656" y="4156456"/>
+            <a:ext cx="45720" cy="711708"/>
+          </a:xfrm>
+          <a:prstGeom prst="roundRect">
+            <a:avLst>
+              <a:gd name="adj" fmla="val 50000"/>
+            </a:avLst>
+          </a:prstGeom>
+          <a:solidFill>
+            <a:srgbClr val="5B3FD6"/>
+          </a:solidFill>
+          <a:ln>
+            <a:noFill/>
+          </a:ln>
+          <a:effectLst/>
+        </p:spPr>
+        <p:style>
+          <a:lnRef idx="1">
+            <a:schemeClr val="accent1"/>
+          </a:lnRef>
+          <a:fillRef idx="3">
+            <a:schemeClr val="accent1"/>
+          </a:fillRef>
+          <a:effectRef idx="2">
+            <a:schemeClr val="accent1"/>
+          </a:effectRef>
+          <a:fontRef idx="minor">
+            <a:schemeClr val="lt1"/>
+          </a:fontRef>
+        </p:style>
+        <p:txBody>
+          <a:bodyPr rtlCol="0" anchor="ctr" wrap="square"/>
+          <a:lstStyle/>
+          <a:p>
+            <a:pPr algn="ctr"/>
+          </a:p>
+        </p:txBody>
+      </p:sp>
+      <p:sp>
+        <p:nvSpPr>
+          <p:cNvPr id="13" name="TextBox 12"/>
+          <p:cNvSpPr txBox="1"/>
+          <p:nvPr/>
+        </p:nvSpPr>
+        <p:spPr>
+          <a:xfrm>
+            <a:off x="877824" y="4147312"/>
+            <a:ext cx="10564063" cy="784860"/>
+          </a:xfrm>
+          <a:prstGeom prst="rect">
+            <a:avLst/>
+          </a:prstGeom>
+          <a:noFill/>
+        </p:spPr>
+        <p:txBody>
+          <a:bodyPr wrap="square" anchor="ctr" lIns="0" rIns="0" tIns="0" bIns="0">
+            <a:spAutoFit/>
+          </a:bodyPr>
+          <a:lstStyle/>
+          <a:p>
+            <a:r>
+              <a:rPr sz="1300" b="1">
+                <a:solidFill>
+                  <a:srgbClr val="5B3FD6"/>
+                </a:solidFill>
+                <a:latin typeface="Calibri"/>
+              </a:rPr>
+              <a:t>The words. </a:t>
+            </a:r>
+            <a:r>
+              <a:rPr sz="1300" b="0" i="0">
+                <a:solidFill>
+                  <a:srgbClr val="1A1440"/>
+                </a:solidFill>
+                <a:latin typeface="Calibri"/>
+              </a:rPr>
+              <a:t>Month-two retention is the dashboard's name for the share of members two or more months past their signup month who ordered in the month; a member with no order in a month is not retained that month, and she is still a member. A cohort problem sits in some signup months; an everyone problem hits members of every signup month at once.</a:t>
+            </a:r>
+          </a:p>
+        </p:txBody>
+      </p:sp>
+      <p:sp>
+        <p:nvSpPr>
+          <p:cNvPr id="14" name="TextBox 13"/>
+          <p:cNvSpPr txBox="1"/>
+          <p:nvPr/>
+        </p:nvSpPr>
+        <p:spPr>
+          <a:xfrm>
+            <a:off x="530352" y="5160772"/>
+            <a:ext cx="11130991" cy="461264"/>
           </a:xfrm>
           <a:prstGeom prst="rect">
             <a:avLst/>
@@ -25147,11 +25294,11 @@
           <a:p>
             <a:pPr>
               <a:spcAft>
-                <a:spcPts val="800"/>
+                <a:spcPts val="700"/>
               </a:spcAft>
             </a:pPr>
             <a:r>
-              <a:rPr sz="1600" b="0" i="0">
+              <a:rPr sz="1400" b="0" i="0">
                 <a:solidFill>
                   <a:srgbClr val="1A1440"/>
                 </a:solidFill>
@@ -25164,7 +25311,7 @@
       </p:sp>
       <p:sp>
         <p:nvSpPr>
-          <p:cNvPr id="12" name="Oval 11"/>
+          <p:cNvPr id="15" name="Oval 14"/>
           <p:cNvSpPr/>
           <p:nvPr/>
         </p:nvSpPr>
@@ -25208,7 +25355,7 @@
       </p:sp>
       <p:sp>
         <p:nvSpPr>
-          <p:cNvPr id="13" name="TextBox 12"/>
+          <p:cNvPr id="16" name="TextBox 15"/>
           <p:cNvSpPr txBox="1"/>
           <p:nvPr/>
         </p:nvSpPr>
@@ -25243,7 +25390,7 @@
       </p:sp>
       <p:sp>
         <p:nvSpPr>
-          <p:cNvPr id="14" name="Oval 13"/>
+          <p:cNvPr id="17" name="Oval 16"/>
           <p:cNvSpPr/>
           <p:nvPr/>
         </p:nvSpPr>
@@ -25287,7 +25434,7 @@
       </p:sp>
       <p:sp>
         <p:nvSpPr>
-          <p:cNvPr id="15" name="TextBox 14"/>
+          <p:cNvPr id="18" name="TextBox 17"/>
           <p:cNvSpPr txBox="1"/>
           <p:nvPr/>
         </p:nvSpPr>
@@ -25322,7 +25469,7 @@
       </p:sp>
       <p:sp>
         <p:nvSpPr>
-          <p:cNvPr id="16" name="Oval 15"/>
+          <p:cNvPr id="19" name="Oval 18"/>
           <p:cNvSpPr/>
           <p:nvPr/>
         </p:nvSpPr>
@@ -25366,7 +25513,7 @@
       </p:sp>
       <p:sp>
         <p:nvSpPr>
-          <p:cNvPr id="17" name="TextBox 16"/>
+          <p:cNvPr id="20" name="TextBox 19"/>
           <p:cNvSpPr txBox="1"/>
           <p:nvPr/>
         </p:nvSpPr>
@@ -25401,7 +25548,7 @@
       </p:sp>
       <p:sp>
         <p:nvSpPr>
-          <p:cNvPr id="18" name="TextBox 17"/>
+          <p:cNvPr id="21" name="TextBox 20"/>
           <p:cNvSpPr txBox="1"/>
           <p:nvPr/>
         </p:nvSpPr>
@@ -27456,7 +27603,7 @@
                 </a:solidFill>
                 <a:latin typeface="Calibri"/>
               </a:rPr>
-              <a:t>c) Checkout to order, the last step</a:t>
+              <a:t>c) Open to search, the first step</a:t>
             </a:r>
           </a:p>
           <a:p>
@@ -27472,7 +27619,7 @@
                 </a:solidFill>
                 <a:latin typeface="Calibri"/>
               </a:rPr>
-              <a:t>d) None can be named until each step is read in one unit and split by platform and date</a:t>
+              <a:t>d) None, until each step is split by platform and date and set against the weeks before</a:t>
             </a:r>
           </a:p>
         </p:txBody>
@@ -27992,7 +28139,7 @@
       </p:sp>
       <p:pic>
         <p:nvPicPr>
-          <p:cNvPr id="9" name="mermaid diagram" descr="4b4cc8b3531b7148.png"/>
+          <p:cNvPr id="9" name="mermaid diagram" descr="77696b2b83291b3e.png"/>
           <p:cNvPicPr>
             <a:picLocks noChangeAspect="1"/>
           </p:cNvPicPr>
@@ -28007,7 +28154,7 @@
         <p:spPr>
           <a:xfrm>
             <a:off x="530352" y="1956816"/>
-            <a:ext cx="11130991" cy="759497"/>
+            <a:ext cx="11130991" cy="712476"/>
           </a:xfrm>
           <a:prstGeom prst="rect">
             <a:avLst/>
@@ -28022,8 +28169,8 @@
         </p:nvSpPr>
         <p:spPr>
           <a:xfrm>
-            <a:off x="530352" y="2862617"/>
-            <a:ext cx="11130991" cy="1048512"/>
+            <a:off x="530352" y="2815596"/>
+            <a:ext cx="11130991" cy="1601216"/>
           </a:xfrm>
           <a:prstGeom prst="rect">
             <a:avLst/>
@@ -28048,7 +28195,7 @@
                 </a:solidFill>
                 <a:latin typeface="Calibri"/>
               </a:rPr>
-              <a:t>The answer is d. Each step's rate divides it by the step before, in one unit (a toy, invented). If those 10 checkouts came from 50 sessions of 20 people, checkout is 10 of 50 per session and 10 of 20 per person. A step that is always low, such as browsing menus, is normal; a loss is a step that changed.</a:t>
+              <a:t>The answer is d. Each step's rate divides it by the step before, in one unit, here sessions, a session being one visit to the app (a toy, invented). Read from the top, 10 of 100 sessions end in a checkout. If the 100 sessions came from 20 people and the 10 checkouts from 10 of them, the same checkouts read 10 of 20 people, 50 percent. A step that is always low, such as browsing menus, is normal; a loss is a step that changed.</a:t>
             </a:r>
           </a:p>
         </p:txBody>
@@ -28585,8 +28732,8 @@
                 <a:tableStyleId>{2D5ABB26-0587-4C30-8999-92F81FD0307C}</a:tableStyleId>
               </a:tblPr>
               <a:tblGrid>
-                <a:gridCol w="9239204"/>
-                <a:gridCol w="1891786"/>
+                <a:gridCol w="6604546"/>
+                <a:gridCol w="4526444"/>
               </a:tblGrid>
               <a:tr h="369824">
                 <a:tc>
@@ -28739,7 +28886,7 @@
                           </a:solidFill>
                           <a:latin typeface="Calibri"/>
                         </a:rPr>
-                        <a:t>Menu views with no search: the home carousel</a:t>
+                        <a:t>Sessions with a menu view and no search: the home carousel</a:t>
                       </a:r>
                     </a:p>
                   </a:txBody>
@@ -28785,7 +28932,7 @@
                           </a:solidFill>
                           <a:latin typeface="Calibri"/>
                         </a:rPr>
-                        <a:t>Of the sessions that searched, the share that opened a menu</a:t>
+                        <a:t>Sessions with a search and a menu view</a:t>
                       </a:r>
                     </a:p>
                   </a:txBody>
@@ -28807,7 +28954,7 @@
                           </a:solidFill>
                           <a:latin typeface="Calibri"/>
                         </a:rPr>
-                        <a:t>89 percent</a:t>
+                        <a:t>116,797, which is 89 percent of 131,974</a:t>
                       </a:r>
                     </a:p>
                   </a:txBody>
@@ -28831,7 +28978,7 @@
         <p:spPr>
           <a:xfrm>
             <a:off x="530352" y="4061968"/>
-            <a:ext cx="11130991" cy="1380744"/>
+            <a:ext cx="11130991" cy="1639824"/>
           </a:xfrm>
           <a:prstGeom prst="roundRect">
             <a:avLst>
@@ -28884,7 +29031,7 @@
         </p:nvSpPr>
         <p:spPr>
           <a:xfrm>
-            <a:off x="758952" y="4523740"/>
+            <a:off x="758952" y="4653280"/>
             <a:ext cx="457200" cy="457200"/>
           </a:xfrm>
           <a:prstGeom prst="ellipse">
@@ -28936,7 +29083,7 @@
         </p:blipFill>
         <p:spPr>
           <a:xfrm>
-            <a:off x="868680" y="4633468"/>
+            <a:off x="868680" y="4763008"/>
             <a:ext cx="237744" cy="237744"/>
           </a:xfrm>
           <a:prstGeom prst="rect">
@@ -28988,7 +29135,7 @@
         <p:spPr>
           <a:xfrm>
             <a:off x="1399031" y="4427728"/>
-            <a:ext cx="9987991" cy="941832"/>
+            <a:ext cx="9987991" cy="1200912"/>
           </a:xfrm>
           <a:prstGeom prst="rect">
             <a:avLst/>
@@ -29008,7 +29155,7 @@
                 </a:solidFill>
                 <a:latin typeface="Calibri"/>
               </a:rPr>
-              <a:t>"Search to menu view is 118 percent, our best step." The home carousel opens a restaurant's menu without a search, so the ratio divides two counts of different sessions: search is a step members can skip. </a:t>
+              <a:t>"Search to menu view is 118 percent, our best step." The home carousel opens a restaurant's menu without a search, so the ratio divides two counts of different sessions: search is a step members can skip, and the 118 is an artefact, a number made by the way the count is taken. </a:t>
             </a:r>
             <a:r>
               <a:rPr sz="1500" b="1" i="0">
@@ -30160,8 +30307,8 @@
         </p:blipFill>
         <p:spPr>
           <a:xfrm>
-            <a:off x="2351950" y="1664208"/>
-            <a:ext cx="7487795" cy="2939288"/>
+            <a:off x="2427574" y="1664208"/>
+            <a:ext cx="7336546" cy="2835656"/>
           </a:xfrm>
           <a:prstGeom prst="rect">
             <a:avLst/>
@@ -30176,7 +30323,7 @@
         </p:nvSpPr>
         <p:spPr>
           <a:xfrm>
-            <a:off x="530352" y="4640072"/>
+            <a:off x="530352" y="4536440"/>
             <a:ext cx="11130991" cy="316992"/>
           </a:xfrm>
           <a:prstGeom prst="rect">
@@ -30211,28 +30358,28 @@
         </p:nvSpPr>
         <p:spPr>
           <a:xfrm>
-            <a:off x="530352" y="4966208"/>
-            <a:ext cx="11130991" cy="1233424"/>
-          </a:xfrm>
-          <a:prstGeom prst="rect">
-            <a:avLst/>
-          </a:prstGeom>
-          <a:noFill/>
-        </p:spPr>
-        <p:txBody>
-          <a:bodyPr wrap="square" anchor="t" lIns="0" rIns="0" tIns="0" bIns="0">
-            <a:spAutoFit/>
-          </a:bodyPr>
-          <a:lstStyle/>
-          <a:p>
-            <a:r>
-              <a:rPr sz="1600" b="0" i="0">
+            <a:off x="530352" y="4862576"/>
+            <a:ext cx="11130991" cy="1337056"/>
+          </a:xfrm>
+          <a:prstGeom prst="rect">
+            <a:avLst/>
+          </a:prstGeom>
+          <a:noFill/>
+        </p:spPr>
+        <p:txBody>
+          <a:bodyPr wrap="square" anchor="t" lIns="0" rIns="0" tIns="0" bIns="0">
+            <a:spAutoFit/>
+          </a:bodyPr>
+          <a:lstStyle/>
+          <a:p>
+            <a:r>
+              <a:rPr sz="1400" b="0" i="0">
                 <a:solidFill>
                   <a:srgbClr val="1A1440"/>
                 </a:solidFill>
                 <a:latin typeface="Calibri"/>
               </a:rPr>
-              <a:t>The answer is c. Per session asks how often a menu visit becomes a cart; per member asks how many members who browsed ever added to a cart that month. Neither is wrong, and a chart that does not name its unit invites the wrong one. Per member, search to menu view still reads 101 percent: counting members shrinks the artefact and leaves it in place.</a:t>
+              <a:t>The answer is c. Per session asks how often a menu visit becomes a cart; per member asks how many members who browsed ever added to a cart that month. Neither is wrong, and a chart that does not name its unit invites the wrong one. Every step reads higher per member, since a member who fails in one session can succeed in another; search to menu view still reads 101. This chart pools every platform and all of September, so neither panel shows the ticket's loss: the split by platform and date does.</a:t>
             </a:r>
           </a:p>
         </p:txBody>
@@ -31366,8 +31513,8 @@
         </p:blipFill>
         <p:spPr>
           <a:xfrm>
-            <a:off x="2753878" y="1664208"/>
-            <a:ext cx="6683937" cy="3215640"/>
+            <a:off x="3035838" y="1664208"/>
+            <a:ext cx="6120017" cy="2939288"/>
           </a:xfrm>
           <a:prstGeom prst="rect">
             <a:avLst/>
@@ -31382,7 +31529,7 @@
         </p:nvSpPr>
         <p:spPr>
           <a:xfrm>
-            <a:off x="530352" y="4916424"/>
+            <a:off x="530352" y="4640072"/>
             <a:ext cx="11130991" cy="316992"/>
           </a:xfrm>
           <a:prstGeom prst="rect">
@@ -31417,8 +31564,8 @@
         </p:nvSpPr>
         <p:spPr>
           <a:xfrm>
-            <a:off x="530352" y="5242560"/>
-            <a:ext cx="11130991" cy="957072"/>
+            <a:off x="530352" y="4966208"/>
+            <a:ext cx="11130991" cy="1233424"/>
           </a:xfrm>
           <a:prstGeom prst="rect">
             <a:avLst/>
@@ -31438,7 +31585,7 @@
                 </a:solidFill>
                 <a:latin typeface="Calibri"/>
               </a:rPr>
-              <a:t>The answer is c. Members on Android: 58 to 44 percent, breaking in the release week and in no week before it. Members on iOS: 57 to 56. Non-members on Android: 52 to 51. Moving the cut a week either way keeps the fall: 58 to 47 with the cut on 7 September, 56 to 43 with it on 21 September.</a:t>
+              <a:t>The answer is c. Members on Android: 58 to 44 percent, about 58 in each of the seven weeks before the release, then 45, 43 and 44. Members on iOS: 57 to 56. Non-members on Android: 52 to 51. Moving the cut a week either way keeps the fall, 58 to 47 with the cut on 7 September and 56 to 43 on 21 September, so the fall does not depend on where the line is drawn.</a:t>
             </a:r>
           </a:p>
         </p:txBody>
@@ -31972,8 +32119,8 @@
         </p:blipFill>
         <p:spPr>
           <a:xfrm>
-            <a:off x="2838136" y="1664208"/>
-            <a:ext cx="6515421" cy="2939288"/>
+            <a:off x="3144426" y="1664208"/>
+            <a:ext cx="5902841" cy="2662936"/>
           </a:xfrm>
           <a:prstGeom prst="rect">
             <a:avLst/>
@@ -31988,7 +32135,7 @@
         </p:nvSpPr>
         <p:spPr>
           <a:xfrm>
-            <a:off x="530352" y="4640072"/>
+            <a:off x="530352" y="4363720"/>
             <a:ext cx="11130991" cy="316992"/>
           </a:xfrm>
           <a:prstGeom prst="rect">
@@ -32023,8 +32170,8 @@
         </p:nvSpPr>
         <p:spPr>
           <a:xfrm>
-            <a:off x="530352" y="4966208"/>
-            <a:ext cx="11130991" cy="1233424"/>
+            <a:off x="530352" y="4689856"/>
+            <a:ext cx="11130991" cy="1509775"/>
           </a:xfrm>
           <a:prstGeom prst="rect">
             <a:avLst/>
@@ -32044,7 +32191,7 @@
                 </a:solidFill>
                 <a:latin typeface="Calibri"/>
               </a:rPr>
-              <a:t>Android members still start checkout from 80 percent of carts, before and after. Completing the order once checkout has started fell from 72.5 to 55 percent. The app team's chart, carts that start checkout on every platform, reads 80 percent flat: true, and it measures the step that did not break. Only members fell, so the place to look is something in the new flow that only members see.</a:t>
+              <a:t>Android members still start checkout from 80 percent of carts, before and after. Completing the order once checkout has started fell from 72.5 to 55 percent, and the two steps multiply to the ticket's numbers: 0.80 × 72.5 = 58, 0.80 × 55 = 44. On this same step, iOS members went from 71 to 70 and non-members on Android from 65 to 64. The app team's chart, carts that start checkout, reads 80 percent flat: true, and it measures the step that did not break.</a:t>
             </a:r>
           </a:p>
         </p:txBody>
@@ -32522,7 +32669,7 @@
                 </a:solidFill>
                 <a:latin typeface="Georgia"/>
               </a:rPr>
-              <a:t>Six things the data cannot show alone</a:t>
+              <a:t>Seven checks before the call</a:t>
             </a:r>
           </a:p>
         </p:txBody>
@@ -32572,7 +32719,7 @@
         </p:nvGraphicFramePr>
         <p:xfrm>
           <a:off x="530352" y="1682496"/>
-          <a:ext cx="11130990" cy="3383280"/>
+          <a:ext cx="11130990" cy="3462528"/>
         </p:xfrm>
         <a:graphic>
           <a:graphicData uri="http://schemas.openxmlformats.org/drawingml/2006/table">
@@ -32581,18 +32728,18 @@
                 <a:tableStyleId>{2D5ABB26-0587-4C30-8999-92F81FD0307C}</a:tableStyleId>
               </a:tblPr>
               <a:tblGrid>
-                <a:gridCol w="3710330"/>
-                <a:gridCol w="3710330"/>
-                <a:gridCol w="3710330"/>
+                <a:gridCol w="3575224"/>
+                <a:gridCol w="3777883"/>
+                <a:gridCol w="3777883"/>
               </a:tblGrid>
-              <a:tr h="335280">
+              <a:tr h="310896">
                 <a:tc>
                   <a:txBody>
                     <a:bodyPr/>
                     <a:lstStyle/>
                     <a:p>
                       <a:r>
-                        <a:rPr sz="1250" b="1" i="0">
+                        <a:rPr sz="1050" b="1" i="0">
                           <a:solidFill>
                             <a:srgbClr val="FFFFFF"/>
                           </a:solidFill>
@@ -32614,7 +32761,7 @@
                     <a:lstStyle/>
                     <a:p>
                       <a:r>
-                        <a:rPr sz="1250" b="1" i="0">
+                        <a:rPr sz="1050" b="1" i="0">
                           <a:solidFill>
                             <a:srgbClr val="FFFFFF"/>
                           </a:solidFill>
@@ -32636,7 +32783,7 @@
                     <a:lstStyle/>
                     <a:p>
                       <a:r>
-                        <a:rPr sz="1250" b="1" i="0">
+                        <a:rPr sz="1050" b="1" i="0">
                           <a:solidFill>
                             <a:srgbClr val="FFFFFF"/>
                           </a:solidFill>
@@ -32653,14 +32800,14 @@
                   </a:tcPr>
                 </a:tc>
               </a:tr>
-              <a:tr h="542544">
+              <a:tr h="473456">
                 <a:tc>
                   <a:txBody>
                     <a:bodyPr/>
                     <a:lstStyle/>
                     <a:p>
                       <a:r>
-                        <a:rPr sz="1200" b="0" i="0">
+                        <a:rPr sz="1000" b="0" i="0">
                           <a:solidFill>
                             <a:srgbClr val="1A1440"/>
                           </a:solidFill>
@@ -32682,13 +32829,13 @@
                     <a:lstStyle/>
                     <a:p>
                       <a:r>
-                        <a:rPr sz="1200" b="0" i="0">
+                        <a:rPr sz="1000" b="0" i="0">
                           <a:solidFill>
                             <a:srgbClr val="1A1440"/>
                           </a:solidFill>
                           <a:latin typeface="Calibri"/>
                         </a:rPr>
-                        <a:t>Its organic members beside July's cohort</a:t>
+                        <a:t>The August cohort's organic members beside July's cohort</a:t>
                       </a:r>
                     </a:p>
                   </a:txBody>
@@ -32704,7 +32851,7 @@
                     <a:lstStyle/>
                     <a:p>
                       <a:r>
-                        <a:rPr sz="1200" b="0" i="0">
+                        <a:rPr sz="1000" b="0" i="0">
                           <a:solidFill>
                             <a:srgbClr val="1A1440"/>
                           </a:solidFill>
@@ -32721,20 +32868,20 @@
                   </a:tcPr>
                 </a:tc>
               </a:tr>
-              <a:tr h="542544">
+              <a:tr h="473456">
                 <a:tc>
                   <a:txBody>
                     <a:bodyPr/>
                     <a:lstStyle/>
                     <a:p>
                       <a:r>
-                        <a:rPr sz="1200" b="0" i="0">
+                        <a:rPr sz="1000" b="0" i="0">
                           <a:solidFill>
                             <a:srgbClr val="1A1440"/>
                           </a:solidFill>
                           <a:latin typeface="Calibri"/>
                         </a:rPr>
-                        <a:t>Censoring: the newest cohorts are young</a:t>
+                        <a:t>Censoring: the newest cohorts have few months on record</a:t>
                       </a:r>
                     </a:p>
                   </a:txBody>
@@ -32750,13 +32897,13 @@
                     <a:lstStyle/>
                     <a:p>
                       <a:r>
-                        <a:rPr sz="1200" b="0" i="0">
+                        <a:rPr sz="1000" b="0" i="0">
                           <a:solidFill>
                             <a:srgbClr val="1A1440"/>
                           </a:solidFill>
                           <a:latin typeface="Calibri"/>
                         </a:rPr>
-                        <a:t>A member who has not left yet is not retained for ever</a:t>
+                        <a:t>Compare cohorts only at ages all have reached; an empty cell is a month not yet lived</a:t>
                       </a:r>
                     </a:p>
                   </a:txBody>
@@ -32772,7 +32919,7 @@
                     <a:lstStyle/>
                     <a:p>
                       <a:r>
-                        <a:rPr sz="1200" b="0" i="0">
+                        <a:rPr sz="1000" b="0" i="0">
                           <a:solidFill>
                             <a:srgbClr val="1A1440"/>
                           </a:solidFill>
@@ -32789,14 +32936,14 @@
                   </a:tcPr>
                 </a:tc>
               </a:tr>
-              <a:tr h="542544">
+              <a:tr h="473456">
                 <a:tc>
                   <a:txBody>
                     <a:bodyPr/>
                     <a:lstStyle/>
                     <a:p>
                       <a:r>
-                        <a:rPr sz="1200" b="0" i="0">
+                        <a:rPr sz="1000" b="0" i="0">
                           <a:solidFill>
                             <a:srgbClr val="1A1440"/>
                           </a:solidFill>
@@ -32818,13 +32965,13 @@
                     <a:lstStyle/>
                     <a:p>
                       <a:r>
-                        <a:rPr sz="1200" b="0" i="0">
+                        <a:rPr sz="1000" b="0" i="0">
                           <a:solidFill>
                             <a:srgbClr val="1A1440"/>
                           </a:solidFill>
                           <a:latin typeface="Calibri"/>
                         </a:rPr>
-                        <a:t>September split by zone</a:t>
+                        <a:t>September split by zone (notebook 02)</a:t>
                       </a:r>
                     </a:p>
                   </a:txBody>
@@ -32840,7 +32987,7 @@
                     <a:lstStyle/>
                     <a:p>
                       <a:r>
-                        <a:rPr sz="1200" b="0" i="0">
+                        <a:rPr sz="1000" b="0" i="0">
                           <a:solidFill>
                             <a:srgbClr val="1A1440"/>
                           </a:solidFill>
@@ -32857,14 +33004,14 @@
                   </a:tcPr>
                 </a:tc>
               </a:tr>
-              <a:tr h="542544">
+              <a:tr h="473456">
                 <a:tc>
                   <a:txBody>
                     <a:bodyPr/>
                     <a:lstStyle/>
                     <a:p>
                       <a:r>
-                        <a:rPr sz="1200" b="0" i="0">
+                        <a:rPr sz="1000" b="0" i="0">
                           <a:solidFill>
                             <a:srgbClr val="1A1440"/>
                           </a:solidFill>
@@ -32886,13 +33033,13 @@
                     <a:lstStyle/>
                     <a:p>
                       <a:r>
-                        <a:rPr sz="1200" b="0" i="0">
+                        <a:rPr sz="1000" b="0" i="0">
                           <a:solidFill>
                             <a:srgbClr val="1A1440"/>
                           </a:solidFill>
                           <a:latin typeface="Calibri"/>
                         </a:rPr>
-                        <a:t>The app team's mapping; the cut moved a week</a:t>
+                        <a:t>Orders in member_months, which event names do not touch, against the event log</a:t>
                       </a:r>
                     </a:p>
                   </a:txBody>
@@ -32908,13 +33055,13 @@
                     <a:lstStyle/>
                     <a:p>
                       <a:r>
-                        <a:rPr sz="1200" b="0" i="0">
+                        <a:rPr sz="1000" b="0" i="0">
                           <a:solidFill>
                             <a:srgbClr val="1A1440"/>
                           </a:solidFill>
                           <a:latin typeface="Calibri"/>
                         </a:rPr>
-                        <a:t>58 to 47, and 56 to 43: the fall holds</a:t>
+                        <a:t>The same 27,212 orders in September: none went missing</a:t>
                       </a:r>
                     </a:p>
                   </a:txBody>
@@ -32925,20 +33072,20 @@
                   </a:tcPr>
                 </a:tc>
               </a:tr>
-              <a:tr h="335280">
+              <a:tr h="473456">
                 <a:tc>
                   <a:txBody>
                     <a:bodyPr/>
                     <a:lstStyle/>
                     <a:p>
                       <a:r>
-                        <a:rPr sz="1200" b="0" i="0">
+                        <a:rPr sz="1000" b="0" i="0">
                           <a:solidFill>
                             <a:srgbClr val="1A1440"/>
                           </a:solidFill>
                           <a:latin typeface="Calibri"/>
                         </a:rPr>
-                        <a:t>Sessions against members</a:t>
+                        <a:t>Mix inside the split: the August cohort aged across 14 September</a:t>
                       </a:r>
                     </a:p>
                   </a:txBody>
@@ -32954,13 +33101,13 @@
                     <a:lstStyle/>
                     <a:p>
                       <a:r>
-                        <a:rPr sz="1200" b="0" i="0">
+                        <a:rPr sz="1000" b="0" i="0">
                           <a:solidFill>
                             <a:srgbClr val="1A1440"/>
                           </a:solidFill>
                           <a:latin typeface="Calibri"/>
                         </a:rPr>
-                        <a:t>The unit named on every chart</a:t>
+                        <a:t>Members who joined before August, on the same step</a:t>
                       </a:r>
                     </a:p>
                   </a:txBody>
@@ -32976,13 +33123,13 @@
                     <a:lstStyle/>
                     <a:p>
                       <a:r>
-                        <a:rPr sz="1200" b="0" i="0">
+                        <a:rPr sz="1000" b="0" i="0">
                           <a:solidFill>
                             <a:srgbClr val="1A1440"/>
                           </a:solidFill>
                           <a:latin typeface="Calibri"/>
                         </a:rPr>
-                        <a:t>34 per session, 61 per member, both true</a:t>
+                        <a:t>Android 70.3 to 53.6; iOS 68.6 to 69.3</a:t>
                       </a:r>
                     </a:p>
                   </a:txBody>
@@ -32993,20 +33140,20 @@
                   </a:tcPr>
                 </a:tc>
               </a:tr>
-              <a:tr h="542544">
+              <a:tr h="310896">
                 <a:tc>
                   <a:txBody>
                     <a:bodyPr/>
                     <a:lstStyle/>
                     <a:p>
                       <a:r>
-                        <a:rPr sz="1200" b="0" i="0">
+                        <a:rPr sz="1000" b="0" i="0">
                           <a:solidFill>
                             <a:srgbClr val="1A1440"/>
                           </a:solidFill>
                           <a:latin typeface="Calibri"/>
                         </a:rPr>
-                        <a:t>Before and after is not cause</a:t>
+                        <a:t>Sessions against members</a:t>
                       </a:r>
                     </a:p>
                   </a:txBody>
@@ -33022,13 +33169,13 @@
                     <a:lstStyle/>
                     <a:p>
                       <a:r>
-                        <a:rPr sz="1200" b="0" i="0">
+                        <a:rPr sz="1000" b="0" i="0">
                           <a:solidFill>
                             <a:srgbClr val="1A1440"/>
                           </a:solidFill>
                           <a:latin typeface="Calibri"/>
                         </a:rPr>
-                        <a:t>Zomato Gold's frequency rose about 60 percent after joining</a:t>
+                        <a:t>The unit named on every chart</a:t>
                       </a:r>
                     </a:p>
                   </a:txBody>
@@ -33044,13 +33191,13 @@
                     <a:lstStyle/>
                     <a:p>
                       <a:r>
-                        <a:rPr sz="1200" b="0" i="0">
+                        <a:rPr sz="1000" b="0" i="0">
                           <a:solidFill>
                             <a:srgbClr val="1A1440"/>
                           </a:solidFill>
                           <a:latin typeface="Calibri"/>
                         </a:rPr>
-                        <a:t>Members choose to join when they expect to order more</a:t>
+                        <a:t>34 per session, 61 per member, both true</a:t>
                       </a:r>
                     </a:p>
                   </a:txBody>
@@ -33061,6 +33208,74 @@
                   </a:tcPr>
                 </a:tc>
               </a:tr>
+              <a:tr h="473456">
+                <a:tc>
+                  <a:txBody>
+                    <a:bodyPr/>
+                    <a:lstStyle/>
+                    <a:p>
+                      <a:r>
+                        <a:rPr sz="1000" b="0" i="0">
+                          <a:solidFill>
+                            <a:srgbClr val="1A1440"/>
+                          </a:solidFill>
+                          <a:latin typeface="Calibri"/>
+                        </a:rPr>
+                        <a:t>Joiners' orders rising after they join</a:t>
+                      </a:r>
+                    </a:p>
+                  </a:txBody>
+                  <a:tcPr marL="101600" marR="101600" marT="38100" marB="38100" anchor="ctr">
+                    <a:solidFill>
+                      <a:srgbClr val="FFFFFF"/>
+                    </a:solidFill>
+                  </a:tcPr>
+                </a:tc>
+                <a:tc>
+                  <a:txBody>
+                    <a:bodyPr/>
+                    <a:lstStyle/>
+                    <a:p>
+                      <a:r>
+                        <a:rPr sz="1000" b="0" i="0">
+                          <a:solidFill>
+                            <a:srgbClr val="1A1440"/>
+                          </a:solidFill>
+                          <a:latin typeface="Calibri"/>
+                        </a:rPr>
+                        <a:t>Zomato Gold's frequency rose about 60 percent after joining</a:t>
+                      </a:r>
+                    </a:p>
+                  </a:txBody>
+                  <a:tcPr marL="101600" marR="101600" marT="38100" marB="38100" anchor="ctr">
+                    <a:solidFill>
+                      <a:srgbClr val="FFFFFF"/>
+                    </a:solidFill>
+                  </a:tcPr>
+                </a:tc>
+                <a:tc>
+                  <a:txBody>
+                    <a:bodyPr/>
+                    <a:lstStyle/>
+                    <a:p>
+                      <a:r>
+                        <a:rPr sz="1000" b="0" i="0">
+                          <a:solidFill>
+                            <a:srgbClr val="1A1440"/>
+                          </a:solidFill>
+                          <a:latin typeface="Calibri"/>
+                        </a:rPr>
+                        <a:t>Members join when they expect to order more; the release split has a comparison, this has none</a:t>
+                      </a:r>
+                    </a:p>
+                  </a:txBody>
+                  <a:tcPr marL="101600" marR="101600" marT="38100" marB="38100" anchor="ctr">
+                    <a:solidFill>
+                      <a:srgbClr val="FFFFFF"/>
+                    </a:solidFill>
+                  </a:tcPr>
+                </a:tc>
+              </a:tr>
             </a:tbl>
           </a:graphicData>
         </a:graphic>
@@ -33073,8 +33288,8 @@
         </p:nvSpPr>
         <p:spPr>
           <a:xfrm>
-            <a:off x="530352" y="5321808"/>
-            <a:ext cx="11130991" cy="772160"/>
+            <a:off x="530352" y="5401056"/>
+            <a:ext cx="11130991" cy="703072"/>
           </a:xfrm>
           <a:prstGeom prst="rect">
             <a:avLst/>
@@ -33089,11 +33304,11 @@
           <a:p>
             <a:pPr>
               <a:spcAft>
-                <a:spcPts val="800"/>
+                <a:spcPts val="700"/>
               </a:spcAft>
             </a:pPr>
             <a:r>
-              <a:rPr sz="1600" b="0" i="0">
+              <a:rPr sz="1400" b="0" i="0">
                 <a:solidFill>
                   <a:srgbClr val="1A1440"/>
                 </a:solidFill>
@@ -33744,7 +33959,7 @@
                           </a:solidFill>
                           <a:latin typeface="Calibri"/>
                         </a:rPr>
-                        <a:t>The app team's event mapping, and the release date moved a week either way</a:t>
+                        <a:t>The orders counted a second way, in the order records, against the app's event log</a:t>
                       </a:r>
                     </a:p>
                   </a:txBody>
@@ -33836,7 +34051,7 @@
                           </a:solidFill>
                           <a:latin typeface="Calibri"/>
                         </a:rPr>
-                        <a:t>The cohort table, each signup month at each age</a:t>
+                        <a:t>The cohort table, each signup month read at the same age</a:t>
                       </a:r>
                     </a:p>
                   </a:txBody>
@@ -33882,7 +34097,7 @@
                           </a:solidFill>
                           <a:latin typeface="Calibri"/>
                         </a:rPr>
-                        <a:t>Every cohort in the same calendar month, split by platform</a:t>
+                        <a:t>One calendar month read across every cohort: did all of them move at once, on one platform?</a:t>
                       </a:r>
                     </a:p>
                   </a:txBody>
@@ -34458,7 +34673,7 @@
       </p:sp>
       <p:pic>
         <p:nvPicPr>
-          <p:cNvPr id="9" name="mermaid diagram" descr="963f09591e2cafb8.png"/>
+          <p:cNvPr id="9" name="mermaid diagram" descr="310bdaed764530a6.png"/>
           <p:cNvPicPr>
             <a:picLocks noChangeAspect="1"/>
           </p:cNvPicPr>
@@ -34473,7 +34688,7 @@
         <p:spPr>
           <a:xfrm>
             <a:off x="530352" y="1956816"/>
-            <a:ext cx="11130991" cy="1165227"/>
+            <a:ext cx="11130991" cy="1149395"/>
           </a:xfrm>
           <a:prstGeom prst="rect">
             <a:avLst/>
@@ -34488,8 +34703,8 @@
         </p:nvSpPr>
         <p:spPr>
           <a:xfrm>
-            <a:off x="530352" y="3268347"/>
-            <a:ext cx="11130991" cy="807720"/>
+            <a:off x="530352" y="3252515"/>
+            <a:ext cx="11130991" cy="1341120"/>
           </a:xfrm>
           <a:prstGeom prst="roundRect">
             <a:avLst>
@@ -34536,8 +34751,8 @@
         </p:nvSpPr>
         <p:spPr>
           <a:xfrm>
-            <a:off x="676656" y="3396363"/>
-            <a:ext cx="45720" cy="551688"/>
+            <a:off x="676656" y="3380531"/>
+            <a:ext cx="45720" cy="1085088"/>
           </a:xfrm>
           <a:prstGeom prst="roundRect">
             <a:avLst>
@@ -34582,8 +34797,8 @@
         </p:nvSpPr>
         <p:spPr>
           <a:xfrm>
-            <a:off x="877824" y="3387219"/>
-            <a:ext cx="10564063" cy="624840"/>
+            <a:off x="877824" y="3371387"/>
+            <a:ext cx="10564063" cy="1158240"/>
           </a:xfrm>
           <a:prstGeom prst="rect">
             <a:avLst/>
@@ -34612,7 +34827,7 @@
                 </a:solidFill>
                 <a:latin typeface="Calibri"/>
               </a:rPr>
-              <a:t>22,841 Android member carts in the 17 days after the release; at the old 58 percent, about 1,317 more orders a week, about Rs 5.3 lakh of orders at Rs 400 an order (an assumption, Rs 300 to Rs 500).</a:t>
+              <a:t>0.14 × 22,841 carts is about 3,198 orders in 17 days: 188 a day, 1,317 a week, or 1,223 net of the point the comparators also lost, about a quarter of Android members' 5,064 orders a week. At Rs 300 to Rs 500 an order (an assumption), Rs 3.7 to 6.6 lakh of order value a week, of which Zomato keeps its commission and fees.</a:t>
             </a:r>
           </a:p>
         </p:txBody>
@@ -34625,8 +34840,8 @@
         </p:nvSpPr>
         <p:spPr>
           <a:xfrm>
-            <a:off x="530352" y="4240659"/>
-            <a:ext cx="11130991" cy="1380744"/>
+            <a:off x="530352" y="4758227"/>
+            <a:ext cx="11130991" cy="1121664"/>
           </a:xfrm>
           <a:prstGeom prst="roundRect">
             <a:avLst>
@@ -34679,7 +34894,7 @@
         </p:nvSpPr>
         <p:spPr>
           <a:xfrm>
-            <a:off x="758952" y="4702431"/>
+            <a:off x="758952" y="5090459"/>
             <a:ext cx="457200" cy="457200"/>
           </a:xfrm>
           <a:prstGeom prst="ellipse">
@@ -34731,7 +34946,7 @@
         </p:blipFill>
         <p:spPr>
           <a:xfrm>
-            <a:off x="868680" y="4812159"/>
+            <a:off x="868680" y="5200187"/>
             <a:ext cx="237744" cy="237744"/>
           </a:xfrm>
           <a:prstGeom prst="rect">
@@ -34747,7 +34962,7 @@
         </p:nvSpPr>
         <p:spPr>
           <a:xfrm>
-            <a:off x="1399031" y="4386963"/>
+            <a:off x="1399031" y="4904531"/>
             <a:ext cx="9987991" cy="160401"/>
           </a:xfrm>
           <a:prstGeom prst="rect">
@@ -34782,8 +34997,8 @@
         </p:nvSpPr>
         <p:spPr>
           <a:xfrm>
-            <a:off x="1399031" y="4606419"/>
-            <a:ext cx="9987991" cy="941832"/>
+            <a:off x="1399031" y="5123987"/>
+            <a:ext cx="9987991" cy="682752"/>
           </a:xfrm>
           <a:prstGeom prst="rect">
             <a:avLst/>
@@ -34803,7 +35018,7 @@
                 </a:solidFill>
                 <a:latin typeface="Calibri"/>
               </a:rPr>
-              <a:t>Name the unit, split by who, where and when, and find the step that changed before blaming the step that is low. A "good" retention number does not exist without its definition: Amplitude's 7 percent on day seven is a vendor's top-quarter mark (its blog, checked 12 October 2026).</a:t>
+              <a:t>Name the unit, split by who, where and when, and find the step that changed before blaming the step that is low.</a:t>
             </a:r>
           </a:p>
         </p:txBody>
@@ -36393,7 +36608,7 @@
         <p:spPr>
           <a:xfrm>
             <a:off x="3523411" y="4464812"/>
-            <a:ext cx="2316403" cy="201676"/>
+            <a:ext cx="2316403" cy="366776"/>
           </a:xfrm>
           <a:prstGeom prst="rect">
             <a:avLst/>
@@ -36414,7 +36629,7 @@
                 </a:solidFill>
                 <a:latin typeface="Calibri"/>
               </a:rPr>
-              <a:t>Twelve real members, counted by age</a:t>
+              <a:t>Twelve members of the case data, counted by age</a:t>
             </a:r>
           </a:p>
         </p:txBody>
@@ -36826,7 +37041,7 @@
                 </a:solidFill>
                 <a:latin typeface="Calibri"/>
               </a:rPr>
-              <a:t>Two more batches, then a real company's chart</a:t>
+              <a:t>Two more batches, then two real companies' cohort reports</a:t>
             </a:r>
           </a:p>
         </p:txBody>
@@ -37915,7 +38130,7 @@
                 </a:solidFill>
                 <a:latin typeface="Georgia"/>
               </a:rPr>
-              <a:t>The card: twelve real members, four months</a:t>
+              <a:t>The card: twelve members, four months</a:t>
             </a:r>
           </a:p>
         </p:txBody>
@@ -37974,9 +38189,9 @@
                 <a:tableStyleId>{2D5ABB26-0587-4C30-8999-92F81FD0307C}</a:tableStyleId>
               </a:tblPr>
               <a:tblGrid>
-                <a:gridCol w="3943645"/>
+                <a:gridCol w="5644591"/>
                 <a:gridCol w="914400"/>
-                <a:gridCol w="2615346"/>
+                <a:gridCol w="914400"/>
                 <a:gridCol w="914400"/>
                 <a:gridCol w="914400"/>
                 <a:gridCol w="914400"/>
@@ -39379,7 +39594,7 @@
                           </a:solidFill>
                           <a:latin typeface="Calibri"/>
                         </a:rPr>
-                        <a:t>ZG40539 to ZG42328</a:t>
+                        <a:t>ZG40539, ZG41000, ZG41529, ZG42328</a:t>
                       </a:r>
                     </a:p>
                   </a:txBody>
@@ -39423,7 +39638,7 @@
                           </a:solidFill>
                           <a:latin typeface="Calibri"/>
                         </a:rPr>
-                        <a:t>sale (four)</a:t>
+                        <a:t>sale</a:t>
                       </a:r>
                     </a:p>
                   </a:txBody>
@@ -39491,7 +39706,7 @@
                           </a:solidFill>
                           <a:latin typeface="Calibri"/>
                         </a:rPr>
-                        <a:t>0</a:t>
+                        <a:t>0 each</a:t>
                       </a:r>
                     </a:p>
                   </a:txBody>

--- a/content/W04/D4/slides/C2_W04_D04_half1_STUDENT.pptx
+++ b/content/W04/D4/slides/C2_W04_D04_half1_STUDENT.pptx
@@ -3801,7 +3801,7 @@
           </a:p>
           <a:p>
             <a:r>
-              <a:t>Transition: twelve real members of the case.</a:t>
+              <a:t>Transition: twelve members of the case data.</a:t>
             </a:r>
           </a:p>
         </p:txBody>
@@ -19167,7 +19167,7 @@
         <p:spPr>
           <a:xfrm>
             <a:off x="530352" y="3419856"/>
-            <a:ext cx="11130991" cy="772160"/>
+            <a:ext cx="11130991" cy="1048512"/>
           </a:xfrm>
           <a:prstGeom prst="rect">
             <a:avLst/>
@@ -19192,7 +19192,7 @@
                 </a:solidFill>
                 <a:latin typeface="Calibri"/>
               </a:rPr>
-              <a:t>The answer is b: the dashboard prints 38 every month. Each month one more cohort enters the count at about 38.5 percent, just above the older cohorts' slow slide, so the average holds while every cohort falls.</a:t>
+              <a:t>The answer is b: the dashboard prints 38 every month. Each month one more cohort enters the count at about 38.5 percent, just above the older cohorts' slow slide, so the average holds while every cohort falls. It counts every member aged two or more, so it is not the table's month-two column.</a:t>
             </a:r>
           </a:p>
         </p:txBody>

--- a/content/W04/D4/slides/C2_W04_D04_half1_STUDENT.pptx
+++ b/content/W04/D4/slides/C2_W04_D04_half1_STUDENT.pptx
@@ -11928,7 +11928,7 @@
                 </a:solidFill>
                 <a:latin typeface="Georgia"/>
               </a:rPr>
-              <a:t>Blinkit and Swiggy publish cohorts, not one blend</a:t>
+              <a:t>Blinkit and Swiggy report retention by cohort</a:t>
             </a:r>
           </a:p>
         </p:txBody>

--- a/content/W04/D4/slides/C2_W04_D04_half1_STUDENT.pptx
+++ b/content/W04/D4/slides/C2_W04_D04_half1_STUDENT.pptx
@@ -1381,7 +1381,7 @@
           </a:p>
           <a:p>
             <a:r>
-              <a:t>carries it in: each group fell with age, the sale-week members kept 1 of 5, and the dashboard's way</a:t>
+              <a:t>carries it in: each group fell with age, the sale-week members kept 0 of 5, and the dashboard's way</a:t>
             </a:r>
           </a:p>
           <a:p>
@@ -3876,12 +3876,12 @@
           </a:p>
           <a:p>
             <a:r>
-              <a:t>in May, ordered in June and July, then stopped. The last line holds four sale-week members, named</a:t>
-            </a:r>
-          </a:p>
-          <a:p>
-            <a:r>
-              <a:t>one by one, none of whom ordered in September. Ask each table to rewrite the card by months since joining instead of by</a:t>
+              <a:t>in May, ordered in June and July, then stopped. The last line holds the five sale-week members,</a:t>
+            </a:r>
+          </a:p>
+          <a:p>
+            <a:r>
+              <a:t>named one by one, none of whom ordered in September. Ask each table to rewrite the card by months since joining instead of by</a:t>
             </a:r>
           </a:p>
           <a:p>
@@ -8265,7 +8265,7 @@
                 </a:solidFill>
                 <a:latin typeface="Georgia"/>
               </a:rPr>
-              <a:t>Answer: May 3 of 4, June 2 of 3, sale 1 of 5</a:t>
+              <a:t>Answer: May 3 of 4, June 2 of 3, sale 0 of 5</a:t>
             </a:r>
           </a:p>
         </p:txBody>
@@ -8691,7 +8691,7 @@
                           </a:solidFill>
                           <a:latin typeface="Calibri"/>
                         </a:rPr>
-                        <a:t>1 of 5</a:t>
+                        <a:t>0 of 5</a:t>
                       </a:r>
                     </a:p>
                   </a:txBody>
@@ -8776,7 +8776,7 @@
                 </a:solidFill>
                 <a:latin typeface="Calibri"/>
               </a:rPr>
-              <a:t>The answer is a. Each group falls as it ages, and each later group starts lower: 75, 67 and then 20 percent in month one. A </a:t>
+              <a:t>The answer is a. Each group falls as it ages, and each later group starts lower: 75, 67 and then 0 percent in month one. A </a:t>
             </a:r>
             <a:r>
               <a:rPr sz="1600" b="1" i="0">
@@ -9394,7 +9394,7 @@
                 </a:solidFill>
                 <a:latin typeface="Calibri"/>
               </a:rPr>
-              <a:t>d) 3 of 12 in both months</a:t>
+              <a:t>d) 2 of 12 in both months</a:t>
             </a:r>
           </a:p>
         </p:txBody>
@@ -10195,7 +10195,7 @@
                           </a:solidFill>
                           <a:latin typeface="Calibri"/>
                         </a:rPr>
-                        <a:t>3 of 12</a:t>
+                        <a:t>2 of 12</a:t>
                       </a:r>
                     </a:p>
                   </a:txBody>
@@ -10244,7 +10244,7 @@
                 </a:solidFill>
                 <a:latin typeface="Calibri"/>
               </a:rPr>
-              <a:t>The answer is b. The dashboard's way did not move from August to September, though five members joined in the sale week and four of them did not order: they are outside its count until October. Counted for everyone, September reads 3 of 12.</a:t>
+              <a:t>The answer is b. The dashboard's way did not move from August to September, though five members joined in the sale week and none of them ordered: they are outside its count until October. Counted for everyone, September reads 2 of 12.</a:t>
             </a:r>
           </a:p>
         </p:txBody>
@@ -12976,7 +12976,7 @@
       </p:sp>
       <p:pic>
         <p:nvPicPr>
-          <p:cNvPr id="9" name="mermaid diagram" descr="5b72f46379a9e272.png"/>
+          <p:cNvPr id="9" name="mermaid diagram" descr="51730f3559232a6a.png"/>
           <p:cNvPicPr>
             <a:picLocks noChangeAspect="1"/>
           </p:cNvPicPr>
@@ -38179,8 +38179,8 @@
           <p:nvPr/>
         </p:nvGraphicFramePr>
         <p:xfrm>
-          <a:off x="530352" y="1682496"/>
-          <a:ext cx="11130991" cy="3352800"/>
+          <a:off x="530352" y="1918208"/>
+          <a:ext cx="11130991" cy="3017520"/>
         </p:xfrm>
         <a:graphic>
           <a:graphicData uri="http://schemas.openxmlformats.org/drawingml/2006/table">
@@ -39458,7 +39458,7 @@
                           </a:solidFill>
                           <a:latin typeface="Calibri"/>
                         </a:rPr>
-                        <a:t>ZG38681</a:t>
+                        <a:t>ZG39559, ZG40539, ZG41000, ZG41529, ZG42328</a:t>
                       </a:r>
                     </a:p>
                   </a:txBody>
@@ -39570,7 +39570,7 @@
                           </a:solidFill>
                           <a:latin typeface="Calibri"/>
                         </a:rPr>
-                        <a:t>1</a:t>
+                        <a:t>0 each</a:t>
                       </a:r>
                     </a:p>
                   </a:txBody>
@@ -39581,142 +39581,6 @@
                   </a:tcPr>
                 </a:tc>
               </a:tr>
-              <a:tr h="335280">
-                <a:tc>
-                  <a:txBody>
-                    <a:bodyPr/>
-                    <a:lstStyle/>
-                    <a:p>
-                      <a:r>
-                        <a:rPr sz="1200" b="0" i="0">
-                          <a:solidFill>
-                            <a:srgbClr val="1A1440"/>
-                          </a:solidFill>
-                          <a:latin typeface="Calibri"/>
-                        </a:rPr>
-                        <a:t>ZG40539, ZG41000, ZG41529, ZG42328</a:t>
-                      </a:r>
-                    </a:p>
-                  </a:txBody>
-                  <a:tcPr marL="101600" marR="101600" marT="38100" marB="38100" anchor="ctr">
-                    <a:solidFill>
-                      <a:srgbClr val="FFFFFF"/>
-                    </a:solidFill>
-                  </a:tcPr>
-                </a:tc>
-                <a:tc>
-                  <a:txBody>
-                    <a:bodyPr/>
-                    <a:lstStyle/>
-                    <a:p>
-                      <a:r>
-                        <a:rPr sz="1200" b="0" i="0">
-                          <a:solidFill>
-                            <a:srgbClr val="1A1440"/>
-                          </a:solidFill>
-                          <a:latin typeface="Calibri"/>
-                        </a:rPr>
-                        <a:t>Aug</a:t>
-                      </a:r>
-                    </a:p>
-                  </a:txBody>
-                  <a:tcPr marL="101600" marR="101600" marT="38100" marB="38100" anchor="ctr">
-                    <a:solidFill>
-                      <a:srgbClr val="FFFFFF"/>
-                    </a:solidFill>
-                  </a:tcPr>
-                </a:tc>
-                <a:tc>
-                  <a:txBody>
-                    <a:bodyPr/>
-                    <a:lstStyle/>
-                    <a:p>
-                      <a:r>
-                        <a:rPr sz="1200" b="0" i="0">
-                          <a:solidFill>
-                            <a:srgbClr val="1A1440"/>
-                          </a:solidFill>
-                          <a:latin typeface="Calibri"/>
-                        </a:rPr>
-                        <a:t>sale</a:t>
-                      </a:r>
-                    </a:p>
-                  </a:txBody>
-                  <a:tcPr marL="101600" marR="101600" marT="38100" marB="38100" anchor="ctr">
-                    <a:solidFill>
-                      <a:srgbClr val="FFFFFF"/>
-                    </a:solidFill>
-                  </a:tcPr>
-                </a:tc>
-                <a:tc>
-                  <a:txBody>
-                    <a:bodyPr/>
-                    <a:lstStyle/>
-                    <a:p/>
-                  </a:txBody>
-                  <a:tcPr marL="101600" marR="101600" marT="38100" marB="38100" anchor="ctr">
-                    <a:solidFill>
-                      <a:srgbClr val="FFFFFF"/>
-                    </a:solidFill>
-                  </a:tcPr>
-                </a:tc>
-                <a:tc>
-                  <a:txBody>
-                    <a:bodyPr/>
-                    <a:lstStyle/>
-                    <a:p/>
-                  </a:txBody>
-                  <a:tcPr marL="101600" marR="101600" marT="38100" marB="38100" anchor="ctr">
-                    <a:solidFill>
-                      <a:srgbClr val="FFFFFF"/>
-                    </a:solidFill>
-                  </a:tcPr>
-                </a:tc>
-                <a:tc>
-                  <a:txBody>
-                    <a:bodyPr/>
-                    <a:lstStyle/>
-                    <a:p>
-                      <a:r>
-                        <a:rPr sz="1200" b="0" i="0">
-                          <a:solidFill>
-                            <a:srgbClr val="1A1440"/>
-                          </a:solidFill>
-                          <a:latin typeface="Calibri"/>
-                        </a:rPr>
-                        <a:t>joined</a:t>
-                      </a:r>
-                    </a:p>
-                  </a:txBody>
-                  <a:tcPr marL="101600" marR="101600" marT="38100" marB="38100" anchor="ctr">
-                    <a:solidFill>
-                      <a:srgbClr val="FFFFFF"/>
-                    </a:solidFill>
-                  </a:tcPr>
-                </a:tc>
-                <a:tc>
-                  <a:txBody>
-                    <a:bodyPr/>
-                    <a:lstStyle/>
-                    <a:p>
-                      <a:r>
-                        <a:rPr sz="1200" b="0" i="0">
-                          <a:solidFill>
-                            <a:srgbClr val="1A1440"/>
-                          </a:solidFill>
-                          <a:latin typeface="Calibri"/>
-                        </a:rPr>
-                        <a:t>0 each</a:t>
-                      </a:r>
-                    </a:p>
-                  </a:txBody>
-                  <a:tcPr marL="101600" marR="101600" marT="38100" marB="38100" anchor="ctr">
-                    <a:solidFill>
-                      <a:srgbClr val="FFFFFF"/>
-                    </a:solidFill>
-                  </a:tcPr>
-                </a:tc>
-              </a:tr>
             </a:tbl>
           </a:graphicData>
         </a:graphic>
@@ -39729,7 +39593,7 @@
         </p:nvSpPr>
         <p:spPr>
           <a:xfrm>
-            <a:off x="530352" y="5291328"/>
+            <a:off x="530352" y="5191760"/>
             <a:ext cx="11130991" cy="772160"/>
           </a:xfrm>
           <a:prstGeom prst="rect">

--- a/content/W04/D4/slides/C2_W04_D04_half1_STUDENT.pptx
+++ b/content/W04/D4/slides/C2_W04_D04_half1_STUDENT.pptx
@@ -11977,7 +11977,7 @@
         <p:spPr>
           <a:xfrm>
             <a:off x="530352" y="1956816"/>
-            <a:ext cx="5474055" cy="2534412"/>
+            <a:ext cx="5474055" cy="2724404"/>
           </a:xfrm>
           <a:prstGeom prst="roundRect">
             <a:avLst>
@@ -12204,7 +12204,7 @@
         <p:spPr>
           <a:xfrm>
             <a:off x="6187287" y="1956816"/>
-            <a:ext cx="5474055" cy="2534412"/>
+            <a:ext cx="5474055" cy="2724404"/>
           </a:xfrm>
           <a:prstGeom prst="roundRect">
             <a:avLst>
@@ -12382,7 +12382,7 @@
                 </a:solidFill>
                 <a:latin typeface="Calibri"/>
               </a:rPr>
-              <a:t>Spend by cohort, against the quarter it joined</a:t>
+              <a:t>Spend by cohort, indexed to one cohort's first quarter</a:t>
             </a:r>
           </a:p>
         </p:txBody>
@@ -12396,7 +12396,7 @@
         <p:spPr>
           <a:xfrm>
             <a:off x="6388455" y="3303524"/>
-            <a:ext cx="5071719" cy="944626"/>
+            <a:ext cx="5071719" cy="1126236"/>
           </a:xfrm>
           <a:prstGeom prst="rect">
             <a:avLst/>
@@ -12417,7 +12417,7 @@
                 </a:solidFill>
                 <a:latin typeface="Calibri"/>
               </a:rPr>
-              <a:t>The cohort that joined in Q4 FY24 (January to March 2024) spends 4.14 times in its sixth quarter what it spent in its first. Swiggy says it weaned away users with "low potential Lifetime values", withdrawing the offers that kept them, and the table states no denominator: per user who joined, or per user who stayed?</a:t>
+              <a:t>Every cohort's spend is shown against what the Q4 FY24 cohort (January to March 2024) spent in the quarter it joined, and that cohort spends 4.14 times as much in its sixth quarter. Swiggy says it weaned away users with "low potential Lifetime values", withdrawing the offers that kept them, and the table states no denominator: per user who joined, or per user who stayed?</a:t>
             </a:r>
           </a:p>
         </p:txBody>
@@ -12430,7 +12430,7 @@
         </p:nvSpPr>
         <p:spPr>
           <a:xfrm>
-            <a:off x="530352" y="4674108"/>
+            <a:off x="530352" y="4864100"/>
             <a:ext cx="11130991" cy="772160"/>
           </a:xfrm>
           <a:prstGeom prst="rect">
@@ -25128,7 +25128,7 @@
                 </a:solidFill>
                 <a:latin typeface="Georgia"/>
               </a:rPr>
-              <a:t>"It is both, in two numbers that need different fixes. Retention is a cohort problem: the dashboard starts counting at month two, where every cohort lands near 38.5, so it never sees that each new cohort starts lower in month one, and it has not yet counted the 13,000-member August cohort, whose sale-week members kept 20 percent; in October the dashboard drops to about 33. The order loss hits members of every signup month on Android at one step from the 14 September release: of the checkouts started, 72.5 percent ended in an order before and 55 after, about 1,223 to 1,317 orders a week. Fix the Android checkout first; before buying another sale, work out whether this one's members pay back their discount."</a:t>
+              <a:t>"It is both, in two numbers that need different fixes. Retention is a cohort problem: the dashboard starts counting at month two, where every cohort lands near 38.5, so it never sees that each new cohort starts lower in month one, and it has not yet counted the 13,000-member August cohort, whose sale-week members kept 20 percent; in October the dashboard drops to about 33. The order loss hits members of every signup month on Android at one step from the 14 September release: of the checkouts started, 72.5 percent ended in an order before and 55 after, about 1,133 to 1,317 orders a week. Fix the Android checkout first; before buying another sale, work out whether this one's members pay back their discount."</a:t>
             </a:r>
           </a:p>
         </p:txBody>
@@ -34827,7 +34827,7 @@
                 </a:solidFill>
                 <a:latin typeface="Calibri"/>
               </a:rPr>
-              <a:t>0.14 × 22,841 carts is about 3,198 orders in 17 days: 188 a day, 1,317 a week, or 1,223 net of the point the comparators also lost, about a quarter of Android members' 5,064 orders a week. At Rs 300 to Rs 500 an order (an assumption), Rs 3.7 to 6.6 lakh of order value a week, of which Zomato keeps its commission and fees.</a:t>
+              <a:t>0.14 × 22,841 carts is about 3,198 orders in 17 days: 188 a day, 1,317 a week if none came back; counted in orders placed, 1,133 to 1,266 a week, a quarter of Android members' 5,064. At Rs 300 to Rs 500 an order (an assumption), Rs 3.4 to 6.6 lakh of order value a week, of which Zomato keeps its commission and fees.</a:t>
             </a:r>
           </a:p>
         </p:txBody>

--- a/content/W04/D4/slides/C2_W04_D04_half1_STUDENT.pptx
+++ b/content/W04/D4/slides/C2_W04_D04_half1_STUDENT.pptx
@@ -33061,7 +33061,7 @@
                           </a:solidFill>
                           <a:latin typeface="Calibri"/>
                         </a:rPr>
-                        <a:t>The same 27,212 orders in September: none went missing</a:t>
+                        <a:t>The same 27,212 member orders in September: none went missing</a:t>
                       </a:r>
                     </a:p>
                   </a:txBody>

--- a/content/W04/D4/slides/C2_W04_D04_half1_STUDENT.pptx
+++ b/content/W04/D4/slides/C2_W04_D04_half1_STUDENT.pptx
@@ -12976,7 +12976,7 @@
       </p:sp>
       <p:pic>
         <p:nvPicPr>
-          <p:cNvPr id="9" name="mermaid diagram" descr="51730f3559232a6a.png"/>
+          <p:cNvPr id="9" name="mermaid diagram" descr="df5981e9478e2ad0.png"/>
           <p:cNvPicPr>
             <a:picLocks noChangeAspect="1"/>
           </p:cNvPicPr>
@@ -12990,8 +12990,8 @@
         </p:blipFill>
         <p:spPr>
           <a:xfrm>
-            <a:off x="530352" y="1682496"/>
-            <a:ext cx="11130991" cy="1243975"/>
+            <a:off x="921341" y="1664208"/>
+            <a:ext cx="10349012" cy="2295144"/>
           </a:xfrm>
           <a:prstGeom prst="rect">
             <a:avLst/>
@@ -13006,7 +13006,7 @@
         </p:nvSpPr>
         <p:spPr>
           <a:xfrm>
-            <a:off x="530352" y="3072775"/>
+            <a:off x="530352" y="4005072"/>
             <a:ext cx="11130991" cy="1380744"/>
           </a:xfrm>
           <a:prstGeom prst="roundRect">
@@ -13060,7 +13060,7 @@
         </p:nvSpPr>
         <p:spPr>
           <a:xfrm>
-            <a:off x="758952" y="3534547"/>
+            <a:off x="758952" y="4466844"/>
             <a:ext cx="457200" cy="457200"/>
           </a:xfrm>
           <a:prstGeom prst="ellipse">
@@ -13112,7 +13112,7 @@
         </p:blipFill>
         <p:spPr>
           <a:xfrm>
-            <a:off x="868680" y="3644275"/>
+            <a:off x="868680" y="4576572"/>
             <a:ext cx="237744" cy="237744"/>
           </a:xfrm>
           <a:prstGeom prst="rect">
@@ -13128,7 +13128,7 @@
         </p:nvSpPr>
         <p:spPr>
           <a:xfrm>
-            <a:off x="1399031" y="3219079"/>
+            <a:off x="1399031" y="4151376"/>
             <a:ext cx="9987991" cy="160401"/>
           </a:xfrm>
           <a:prstGeom prst="rect">
@@ -13163,7 +13163,7 @@
         </p:nvSpPr>
         <p:spPr>
           <a:xfrm>
-            <a:off x="1399031" y="3438535"/>
+            <a:off x="1399031" y="4370832"/>
             <a:ext cx="9987991" cy="941832"/>
           </a:xfrm>
           <a:prstGeom prst="rect">
@@ -13197,7 +13197,7 @@
         </p:nvSpPr>
         <p:spPr>
           <a:xfrm>
-            <a:off x="530352" y="4618111"/>
+            <a:off x="530352" y="5550408"/>
             <a:ext cx="11130991" cy="1380744"/>
           </a:xfrm>
           <a:prstGeom prst="roundRect">
@@ -13251,7 +13251,7 @@
         </p:nvSpPr>
         <p:spPr>
           <a:xfrm>
-            <a:off x="758952" y="5079883"/>
+            <a:off x="758952" y="6012180"/>
             <a:ext cx="457200" cy="457200"/>
           </a:xfrm>
           <a:prstGeom prst="ellipse">
@@ -13303,7 +13303,7 @@
         </p:blipFill>
         <p:spPr>
           <a:xfrm>
-            <a:off x="868680" y="5189611"/>
+            <a:off x="868680" y="6121908"/>
             <a:ext cx="237744" cy="237744"/>
           </a:xfrm>
           <a:prstGeom prst="rect">
@@ -13319,7 +13319,7 @@
         </p:nvSpPr>
         <p:spPr>
           <a:xfrm>
-            <a:off x="1399031" y="4764415"/>
+            <a:off x="1399031" y="5696712"/>
             <a:ext cx="9987991" cy="160401"/>
           </a:xfrm>
           <a:prstGeom prst="rect">
@@ -13354,7 +13354,7 @@
         </p:nvSpPr>
         <p:spPr>
           <a:xfrm>
-            <a:off x="1399031" y="4983871"/>
+            <a:off x="1399031" y="5916168"/>
             <a:ext cx="9987991" cy="941832"/>
           </a:xfrm>
           <a:prstGeom prst="rect">
@@ -14123,7 +14123,7 @@
                 </a:solidFill>
                 <a:latin typeface="Calibri"/>
               </a:rPr>
-              <a:t>Week 4 Day 4: who is leaving Zomato Gold, and at which step</a:t>
+              <a:t>Week 4, Day 4. Who is leaving Zomato Gold in Chennai, and at which step?</a:t>
             </a:r>
           </a:p>
         </p:txBody>
@@ -16821,7 +16821,7 @@
       </p:sp>
       <p:pic>
         <p:nvPicPr>
-          <p:cNvPr id="9" name="mermaid diagram" descr="6666cc6ddfa3b618.png"/>
+          <p:cNvPr id="9" name="mermaid diagram" descr="1e025ae40bea612b.png"/>
           <p:cNvPicPr>
             <a:picLocks noChangeAspect="1"/>
           </p:cNvPicPr>
@@ -16835,8 +16835,8 @@
         </p:blipFill>
         <p:spPr>
           <a:xfrm>
-            <a:off x="779525" y="1682496"/>
-            <a:ext cx="10632643" cy="4517136"/>
+            <a:off x="2682134" y="1682496"/>
+            <a:ext cx="6827426" cy="4517136"/>
           </a:xfrm>
           <a:prstGeom prst="rect">
             <a:avLst/>
@@ -23625,7 +23625,7 @@
       </p:sp>
       <p:pic>
         <p:nvPicPr>
-          <p:cNvPr id="9" name="mermaid diagram" descr="49d81dc46918aa92.png"/>
+          <p:cNvPr id="9" name="mermaid diagram" descr="4faa342654827e92.png"/>
           <p:cNvPicPr>
             <a:picLocks noChangeAspect="1"/>
           </p:cNvPicPr>
@@ -23639,8 +23639,8 @@
         </p:blipFill>
         <p:spPr>
           <a:xfrm>
-            <a:off x="530351" y="1937186"/>
-            <a:ext cx="11130991" cy="1453531"/>
+            <a:off x="1826879" y="1664208"/>
+            <a:ext cx="8537935" cy="2295144"/>
           </a:xfrm>
           <a:prstGeom prst="rect">
             <a:avLst/>
@@ -23655,7 +23655,7 @@
         </p:nvSpPr>
         <p:spPr>
           <a:xfrm>
-            <a:off x="530352" y="3537021"/>
+            <a:off x="530352" y="4005072"/>
             <a:ext cx="11130991" cy="1121664"/>
           </a:xfrm>
           <a:prstGeom prst="roundRect">
@@ -23709,7 +23709,7 @@
         </p:nvSpPr>
         <p:spPr>
           <a:xfrm>
-            <a:off x="758952" y="3869253"/>
+            <a:off x="758952" y="4337304"/>
             <a:ext cx="457200" cy="457200"/>
           </a:xfrm>
           <a:prstGeom prst="ellipse">
@@ -23761,7 +23761,7 @@
         </p:blipFill>
         <p:spPr>
           <a:xfrm>
-            <a:off x="868680" y="3978981"/>
+            <a:off x="868680" y="4447032"/>
             <a:ext cx="237744" cy="237744"/>
           </a:xfrm>
           <a:prstGeom prst="rect">
@@ -23777,7 +23777,7 @@
         </p:nvSpPr>
         <p:spPr>
           <a:xfrm>
-            <a:off x="1399031" y="3683325"/>
+            <a:off x="1399031" y="4151376"/>
             <a:ext cx="9987991" cy="160401"/>
           </a:xfrm>
           <a:prstGeom prst="rect">
@@ -23812,7 +23812,7 @@
         </p:nvSpPr>
         <p:spPr>
           <a:xfrm>
-            <a:off x="1399031" y="3902781"/>
+            <a:off x="1399031" y="4370832"/>
             <a:ext cx="9987991" cy="682752"/>
           </a:xfrm>
           <a:prstGeom prst="rect">
@@ -23846,7 +23846,7 @@
         </p:nvSpPr>
         <p:spPr>
           <a:xfrm>
-            <a:off x="530352" y="4823277"/>
+            <a:off x="530352" y="5291328"/>
             <a:ext cx="11130991" cy="1121664"/>
           </a:xfrm>
           <a:prstGeom prst="roundRect">
@@ -23900,7 +23900,7 @@
         </p:nvSpPr>
         <p:spPr>
           <a:xfrm>
-            <a:off x="758952" y="5155509"/>
+            <a:off x="758952" y="5623560"/>
             <a:ext cx="457200" cy="457200"/>
           </a:xfrm>
           <a:prstGeom prst="ellipse">
@@ -23952,7 +23952,7 @@
         </p:blipFill>
         <p:spPr>
           <a:xfrm>
-            <a:off x="868680" y="5265237"/>
+            <a:off x="868680" y="5733288"/>
             <a:ext cx="237744" cy="237744"/>
           </a:xfrm>
           <a:prstGeom prst="rect">
@@ -23968,7 +23968,7 @@
         </p:nvSpPr>
         <p:spPr>
           <a:xfrm>
-            <a:off x="1399031" y="4969581"/>
+            <a:off x="1399031" y="5437632"/>
             <a:ext cx="9987991" cy="160401"/>
           </a:xfrm>
           <a:prstGeom prst="rect">
@@ -24003,7 +24003,7 @@
         </p:nvSpPr>
         <p:spPr>
           <a:xfrm>
-            <a:off x="1399031" y="5189037"/>
+            <a:off x="1399031" y="5657088"/>
             <a:ext cx="9987991" cy="682752"/>
           </a:xfrm>
           <a:prstGeom prst="rect">
@@ -24772,7 +24772,7 @@
                 </a:solidFill>
                 <a:latin typeface="Calibri"/>
               </a:rPr>
-              <a:t>Week 4 Day 4: who is leaving Zomato Gold, and at which step</a:t>
+              <a:t>Week 4, Day 4. Who is leaving Zomato Gold in Chennai, and at which step?</a:t>
             </a:r>
           </a:p>
         </p:txBody>
@@ -28139,7 +28139,7 @@
       </p:sp>
       <p:pic>
         <p:nvPicPr>
-          <p:cNvPr id="9" name="mermaid diagram" descr="77696b2b83291b3e.png"/>
+          <p:cNvPr id="9" name="mermaid diagram" descr="719bb35174f10f2f.png"/>
           <p:cNvPicPr>
             <a:picLocks noChangeAspect="1"/>
           </p:cNvPicPr>
@@ -28153,8 +28153,8 @@
         </p:blipFill>
         <p:spPr>
           <a:xfrm>
-            <a:off x="530352" y="1956816"/>
-            <a:ext cx="11130991" cy="712476"/>
+            <a:off x="530351" y="1956816"/>
+            <a:ext cx="11130991" cy="1096456"/>
           </a:xfrm>
           <a:prstGeom prst="rect">
             <a:avLst/>
@@ -28169,7 +28169,7 @@
         </p:nvSpPr>
         <p:spPr>
           <a:xfrm>
-            <a:off x="530352" y="2815596"/>
+            <a:off x="530352" y="3199576"/>
             <a:ext cx="11130991" cy="1601216"/>
           </a:xfrm>
           <a:prstGeom prst="rect">
@@ -33834,7 +33834,7 @@
       </p:sp>
       <p:pic>
         <p:nvPicPr>
-          <p:cNvPr id="9" name="mermaid diagram" descr="6c03ae8eaa64889d.png"/>
+          <p:cNvPr id="9" name="mermaid diagram" descr="014ba7b686b01944.png"/>
           <p:cNvPicPr>
             <a:picLocks noChangeAspect="1"/>
           </p:cNvPicPr>
@@ -33849,7 +33849,7 @@
         <p:spPr>
           <a:xfrm>
             <a:off x="530352" y="1956816"/>
-            <a:ext cx="11130991" cy="1023688"/>
+            <a:ext cx="11130991" cy="1331913"/>
           </a:xfrm>
           <a:prstGeom prst="rect">
             <a:avLst/>
@@ -33865,7 +33865,7 @@
           <p:nvPr/>
         </p:nvGraphicFramePr>
         <p:xfrm>
-          <a:off x="530352" y="3126808"/>
+          <a:off x="530352" y="3435033"/>
           <a:ext cx="11130991" cy="2218944"/>
         </p:xfrm>
         <a:graphic>
@@ -34673,7 +34673,7 @@
       </p:sp>
       <p:pic>
         <p:nvPicPr>
-          <p:cNvPr id="9" name="mermaid diagram" descr="310bdaed764530a6.png"/>
+          <p:cNvPr id="9" name="mermaid diagram" descr="631100b542aac93e.png"/>
           <p:cNvPicPr>
             <a:picLocks noChangeAspect="1"/>
           </p:cNvPicPr>
@@ -34687,8 +34687,8 @@
         </p:blipFill>
         <p:spPr>
           <a:xfrm>
-            <a:off x="530352" y="1956816"/>
-            <a:ext cx="11130991" cy="1149395"/>
+            <a:off x="530352" y="1830683"/>
+            <a:ext cx="11130991" cy="1962193"/>
           </a:xfrm>
           <a:prstGeom prst="rect">
             <a:avLst/>
@@ -34703,7 +34703,7 @@
         </p:nvSpPr>
         <p:spPr>
           <a:xfrm>
-            <a:off x="530352" y="3252515"/>
+            <a:off x="530352" y="4005072"/>
             <a:ext cx="11130991" cy="1341120"/>
           </a:xfrm>
           <a:prstGeom prst="roundRect">
@@ -34751,7 +34751,7 @@
         </p:nvSpPr>
         <p:spPr>
           <a:xfrm>
-            <a:off x="676656" y="3380531"/>
+            <a:off x="676656" y="4133088"/>
             <a:ext cx="45720" cy="1085088"/>
           </a:xfrm>
           <a:prstGeom prst="roundRect">
@@ -34797,7 +34797,7 @@
         </p:nvSpPr>
         <p:spPr>
           <a:xfrm>
-            <a:off x="877824" y="3371387"/>
+            <a:off x="877824" y="4123944"/>
             <a:ext cx="10564063" cy="1158240"/>
           </a:xfrm>
           <a:prstGeom prst="rect">
@@ -34840,7 +34840,7 @@
         </p:nvSpPr>
         <p:spPr>
           <a:xfrm>
-            <a:off x="530352" y="4758227"/>
+            <a:off x="530352" y="5510784"/>
             <a:ext cx="11130991" cy="1121664"/>
           </a:xfrm>
           <a:prstGeom prst="roundRect">
@@ -34894,7 +34894,7 @@
         </p:nvSpPr>
         <p:spPr>
           <a:xfrm>
-            <a:off x="758952" y="5090459"/>
+            <a:off x="758952" y="5843016"/>
             <a:ext cx="457200" cy="457200"/>
           </a:xfrm>
           <a:prstGeom prst="ellipse">
@@ -34946,7 +34946,7 @@
         </p:blipFill>
         <p:spPr>
           <a:xfrm>
-            <a:off x="868680" y="5200187"/>
+            <a:off x="868680" y="5952744"/>
             <a:ext cx="237744" cy="237744"/>
           </a:xfrm>
           <a:prstGeom prst="rect">
@@ -34962,7 +34962,7 @@
         </p:nvSpPr>
         <p:spPr>
           <a:xfrm>
-            <a:off x="1399031" y="4904531"/>
+            <a:off x="1399031" y="5657088"/>
             <a:ext cx="9987991" cy="160401"/>
           </a:xfrm>
           <a:prstGeom prst="rect">
@@ -34997,7 +34997,7 @@
         </p:nvSpPr>
         <p:spPr>
           <a:xfrm>
-            <a:off x="1399031" y="5123987"/>
+            <a:off x="1399031" y="5876544"/>
             <a:ext cx="9987991" cy="682752"/>
           </a:xfrm>
           <a:prstGeom prst="rect">
@@ -35766,7 +35766,7 @@
                 </a:solidFill>
                 <a:latin typeface="Calibri"/>
               </a:rPr>
-              <a:t>Week 4 Day 4: who is leaving Zomato Gold, and at which step</a:t>
+              <a:t>Week 4, Day 4. Who is leaving Zomato Gold in Chennai, and at which step?</a:t>
             </a:r>
           </a:p>
         </p:txBody>
